--- a/exports/pptx/lessons/middle-module-09-subtraction-nikhilam/day-10-final-assessment.pptx
+++ b/exports/pptx/lessons/middle-module-09-subtraction-nikhilam/day-10-final-assessment.pptx
@@ -17,9 +17,10 @@
     <p:sldId id="265" r:id="rId11"/>
     <p:sldId id="266" r:id="rId12"/>
     <p:sldId id="267" r:id="rId13"/>
+    <p:sldId id="268" r:id="rId14"/>
   </p:sldIdLst>
   <p:notesMasterIdLst>
-    <p:notesMasterId r:id="rId14"/>
+    <p:notesMasterId r:id="rId15"/>
   </p:notesMasterIdLst>
   <p:sldSz cx="9144000" cy="5143500"/>
   <p:notesSz cx="5143500" cy="9144000"/>
@@ -801,6 +802,94 @@
             <a:fld id="{F7021451-1387-4CA6-816F-3879F97B5CBC}" type="slidenum">
               <a:rPr lang="en-US"/>
               <a:t>12</a:t>
+            </a:fld>
+            <a:endParaRPr lang="en-US"/>
+          </a:p>
+        </p:txBody>
+      </p:sp>
+    </p:spTree>
+    <p:extLst>
+      <p:ext uri="{BB962C8B-B14F-4D97-AF65-F5344CB8AC3E}">
+        <p14:creationId xmlns:p14="http://schemas.microsoft.com/office/powerpoint/2010/main" val="1024086991"/>
+      </p:ext>
+    </p:extLst>
+  </p:cSld>
+  <p:clrMapOvr>
+    <a:masterClrMapping/>
+  </p:clrMapOvr>
+</p:notes>
+</file>
+
+<file path=ppt/notesSlides/notesSlide13.xml><?xml version="1.0" encoding="utf-8"?>
+<p:notes xmlns:a="http://schemas.openxmlformats.org/drawingml/2006/main" xmlns:r="http://schemas.openxmlformats.org/officeDocument/2006/relationships" xmlns:p="http://schemas.openxmlformats.org/presentationml/2006/main">
+  <p:cSld>
+    <p:spTree>
+      <p:nvGrpSpPr>
+        <p:cNvPr id="1" name=""/>
+        <p:cNvGrpSpPr/>
+        <p:nvPr/>
+      </p:nvGrpSpPr>
+      <p:grpSpPr>
+        <a:xfrm>
+          <a:off x="0" y="0"/>
+          <a:ext cx="0" cy="0"/>
+          <a:chOff x="0" y="0"/>
+          <a:chExt cx="0" cy="0"/>
+        </a:xfrm>
+      </p:grpSpPr>
+      <p:sp>
+        <p:nvSpPr>
+          <p:cNvPr id="2" name="Slide Image Placeholder 1"/>
+          <p:cNvSpPr>
+            <a:spLocks noGrp="1" noRot="1" noChangeAspect="1"/>
+          </p:cNvSpPr>
+          <p:nvPr>
+            <p:ph type="sldImg"/>
+          </p:nvPr>
+        </p:nvSpPr>
+        <p:spPr/>
+      </p:sp>
+      <p:sp>
+        <p:nvSpPr>
+          <p:cNvPr id="3" name="Notes Placeholder 2"/>
+          <p:cNvSpPr>
+            <a:spLocks noGrp="1"/>
+          </p:cNvSpPr>
+          <p:nvPr>
+            <p:ph type="body" idx="1"/>
+          </p:nvPr>
+        </p:nvSpPr>
+        <p:spPr/>
+        <p:txBody>
+          <a:bodyPr/>
+          <a:lstStyle/>
+          <a:p>
+            <a:r>
+              <a:rPr lang="en-US" dirty="0"/>
+              <a:t/>
+            </a:r>
+            <a:endParaRPr lang="en-US" dirty="0"/>
+          </a:p>
+        </p:txBody>
+      </p:sp>
+      <p:sp>
+        <p:nvSpPr>
+          <p:cNvPr id="4" name="Slide Number Placeholder 3"/>
+          <p:cNvSpPr>
+            <a:spLocks noGrp="1"/>
+          </p:cNvSpPr>
+          <p:nvPr>
+            <p:ph type="sldNum" sz="quarter" idx="10"/>
+          </p:nvPr>
+        </p:nvSpPr>
+        <p:spPr/>
+        <p:txBody>
+          <a:bodyPr/>
+          <a:lstStyle/>
+          <a:p>
+            <a:fld id="{F7021451-1387-4CA6-816F-3879F97B5CBC}" type="slidenum">
+              <a:rPr lang="en-US"/>
+              <a:t>13</a:t>
             </a:fld>
             <a:endParaRPr lang="en-US"/>
           </a:p>
@@ -2100,102 +2189,6 @@
         </p:nvSpPr>
         <p:spPr>
           <a:xfrm>
-            <a:off x="406301" y="1223963"/>
-            <a:ext cx="8498026" cy="274290"/>
-          </a:xfrm>
-          <a:prstGeom prst="rect">
-            <a:avLst/>
-          </a:prstGeom>
-          <a:noFill/>
-          <a:ln/>
-        </p:spPr>
-        <p:txBody>
-          <a:bodyPr wrap="square" lIns="0" tIns="0" rIns="0" bIns="0" rtlCol="0" anchor="t"/>
-          <a:lstStyle/>
-          <a:p>
-            <a:pPr algn="l" indent="0" marL="0">
-              <a:lnSpc>
-                <a:spcPts val="2160"/>
-              </a:lnSpc>
-              <a:spcBef>
-                <a:spcPts val="600"/>
-              </a:spcBef>
-              <a:spcAft>
-                <a:spcPts val="800"/>
-              </a:spcAft>
-              <a:buNone/>
-            </a:pPr>
-            <a:r>
-              <a:rPr lang="en-US" sz="1800" b="1" dirty="0">
-                <a:solidFill>
-                  <a:srgbClr val="FE4447"/>
-                </a:solidFill>
-                <a:latin typeface="Georgia" pitchFamily="34" charset="0"/>
-                <a:ea typeface="Georgia" pitchFamily="34" charset="-122"/>
-                <a:cs typeface="Georgia" pitchFamily="34" charset="-120"/>
-              </a:rPr>
-              <a:t>Learning objective</a:t>
-            </a:r>
-            <a:endParaRPr lang="en-US" sz="1800" dirty="0"/>
-          </a:p>
-        </p:txBody>
-      </p:sp>
-      <p:sp>
-        <p:nvSpPr>
-          <p:cNvPr id="6" name="Text 4"/>
-          <p:cNvSpPr/>
-          <p:nvPr/>
-        </p:nvSpPr>
-        <p:spPr>
-          <a:xfrm>
-            <a:off x="406301" y="1637854"/>
-            <a:ext cx="8498026" cy="426541"/>
-          </a:xfrm>
-          <a:prstGeom prst="rect">
-            <a:avLst/>
-          </a:prstGeom>
-          <a:noFill/>
-          <a:ln/>
-        </p:spPr>
-        <p:txBody>
-          <a:bodyPr wrap="square" lIns="0" tIns="0" rIns="0" bIns="0" rtlCol="0" anchor="t"/>
-          <a:lstStyle/>
-          <a:p>
-            <a:pPr algn="l" indent="0" marL="0">
-              <a:lnSpc>
-                <a:spcPts val="1680"/>
-              </a:lnSpc>
-              <a:spcBef>
-                <a:spcPts val="300"/>
-              </a:spcBef>
-              <a:spcAft>
-                <a:spcPts val="300"/>
-              </a:spcAft>
-              <a:buNone/>
-            </a:pPr>
-            <a:r>
-              <a:rPr lang="en-US" sz="1200" dirty="0">
-                <a:solidFill>
-                  <a:srgbClr val="1C2833"/>
-                </a:solidFill>
-                <a:latin typeface="Arial" pitchFamily="34" charset="0"/>
-                <a:ea typeface="Arial" pitchFamily="34" charset="-122"/>
-                <a:cs typeface="Arial" pitchFamily="34" charset="-120"/>
-              </a:rPr>
-              <a:t>By the end of this lesson, students will complete the summative quiz, present their project artefact in 3 minutes, and submit a brief written self-reflection.</a:t>
-            </a:r>
-            <a:endParaRPr lang="en-US" sz="1200" dirty="0"/>
-          </a:p>
-        </p:txBody>
-      </p:sp>
-      <p:sp>
-        <p:nvSpPr>
-          <p:cNvPr id="7" name="Text 5"/>
-          <p:cNvSpPr/>
-          <p:nvPr/>
-        </p:nvSpPr>
-        <p:spPr>
-          <a:xfrm>
             <a:off x="406301" y="4434929"/>
             <a:ext cx="8498026" cy="213271"/>
           </a:xfrm>
@@ -2340,7 +2333,7 @@
                 <a:ea typeface="Georgia" pitchFamily="34" charset="-122"/>
                 <a:cs typeface="Georgia" pitchFamily="34" charset="-120"/>
               </a:rPr>
-              <a:t>Differentiation</a:t>
+              <a:t>Homework</a:t>
             </a:r>
             <a:endParaRPr lang="en-US" sz="1800" dirty="0"/>
           </a:p>
@@ -2355,7 +2348,7 @@
         <p:spPr>
           <a:xfrm>
             <a:off x="634901" y="883593"/>
-            <a:ext cx="8102798" cy="731341"/>
+            <a:ext cx="8102798" cy="281880"/>
           </a:xfrm>
           <a:prstGeom prst="rect">
             <a:avLst/>
@@ -2378,26 +2371,6 @@
               <a:buChar char="•"/>
             </a:pPr>
             <a:r>
-              <a:rPr lang="en-US" sz="1200" b="1" dirty="0">
-                <a:solidFill>
-                  <a:srgbClr val="1C2833"/>
-                </a:solidFill>
-                <a:latin typeface="Arial" pitchFamily="34" charset="0"/>
-                <a:ea typeface="Arial" pitchFamily="34" charset="-122"/>
-                <a:cs typeface="Arial" pitchFamily="34" charset="-120"/>
-              </a:rPr>
-              <a:t>Tier up:</a:t>
-            </a:r>
-            <a:pPr algn="l" indent="0" marL="0">
-              <a:lnSpc>
-                <a:spcPts val="1620"/>
-              </a:lnSpc>
-              <a:spcAft>
-                <a:spcPts val="300"/>
-              </a:spcAft>
-              <a:buNone/>
-            </a:pPr>
-            <a:r>
               <a:rPr lang="en-US" sz="1200" dirty="0">
                 <a:solidFill>
                   <a:srgbClr val="1C2833"/>
@@ -2406,51 +2379,7 @@
                 <a:ea typeface="Arial" pitchFamily="34" charset="-122"/>
                 <a:cs typeface="Arial" pitchFamily="34" charset="-120"/>
               </a:rPr>
-              <a:t> If finished early on the quiz, write the algebraic identity for the Nikhilam method in full generality (for any base b).</a:t>
-            </a:r>
-            <a:endParaRPr lang="en-US" sz="1200" dirty="0"/>
-          </a:p>
-          <a:p>
-            <a:pPr algn="l" marL="342900" indent="-342900">
-              <a:lnSpc>
-                <a:spcPts val="1620"/>
-              </a:lnSpc>
-              <a:spcAft>
-                <a:spcPts val="300"/>
-              </a:spcAft>
-              <a:buSzPct val="100000"/>
-              <a:buChar char="•"/>
-            </a:pPr>
-            <a:r>
-              <a:rPr lang="en-US" sz="1200" b="1" dirty="0">
-                <a:solidFill>
-                  <a:srgbClr val="1C2833"/>
-                </a:solidFill>
-                <a:latin typeface="Arial" pitchFamily="34" charset="0"/>
-                <a:ea typeface="Arial" pitchFamily="34" charset="-122"/>
-                <a:cs typeface="Arial" pitchFamily="34" charset="-120"/>
-              </a:rPr>
-              <a:t>Tier down:</a:t>
-            </a:r>
-            <a:pPr algn="l" indent="0" marL="0">
-              <a:lnSpc>
-                <a:spcPts val="1620"/>
-              </a:lnSpc>
-              <a:spcAft>
-                <a:spcPts val="300"/>
-              </a:spcAft>
-              <a:buNone/>
-            </a:pPr>
-            <a:r>
-              <a:rPr lang="en-US" sz="1200" dirty="0">
-                <a:solidFill>
-                  <a:srgbClr val="1C2833"/>
-                </a:solidFill>
-                <a:latin typeface="Arial" pitchFamily="34" charset="0"/>
-                <a:ea typeface="Arial" pitchFamily="34" charset="-122"/>
-                <a:cs typeface="Arial" pitchFamily="34" charset="-120"/>
-              </a:rPr>
-              <a:t> Extra 5 min on the quiz allowed for slow processors; quiet pull-aside support.</a:t>
+              <a:t>None. Module ends.</a:t>
             </a:r>
             <a:endParaRPr lang="en-US" sz="1200" dirty="0"/>
           </a:p>
@@ -2608,7 +2537,7 @@
                 <a:ea typeface="Georgia" pitchFamily="34" charset="-122"/>
                 <a:cs typeface="Georgia" pitchFamily="34" charset="-120"/>
               </a:rPr>
-              <a:t>Teacher notes</a:t>
+              <a:t>Differentiation</a:t>
             </a:r>
             <a:endParaRPr lang="en-US" sz="1800" dirty="0"/>
           </a:p>
@@ -2622,8 +2551,8 @@
         </p:nvSpPr>
         <p:spPr>
           <a:xfrm>
-            <a:off x="406301" y="870942"/>
-            <a:ext cx="8498026" cy="1066354"/>
+            <a:off x="634901" y="883593"/>
+            <a:ext cx="8102798" cy="731341"/>
           </a:xfrm>
           <a:prstGeom prst="rect">
             <a:avLst/>
@@ -2635,13 +2564,31 @@
           <a:bodyPr wrap="square" lIns="0" tIns="0" rIns="0" bIns="0" rtlCol="0" anchor="t"/>
           <a:lstStyle/>
           <a:p>
+            <a:pPr algn="l" marL="342900" indent="-342900">
+              <a:lnSpc>
+                <a:spcPts val="1620"/>
+              </a:lnSpc>
+              <a:spcAft>
+                <a:spcPts val="300"/>
+              </a:spcAft>
+              <a:buSzPct val="100000"/>
+              <a:buChar char="•"/>
+            </a:pPr>
+            <a:r>
+              <a:rPr lang="en-US" sz="1200" b="1" dirty="0">
+                <a:solidFill>
+                  <a:srgbClr val="1C2833"/>
+                </a:solidFill>
+                <a:latin typeface="Arial" pitchFamily="34" charset="0"/>
+                <a:ea typeface="Arial" pitchFamily="34" charset="-122"/>
+                <a:cs typeface="Arial" pitchFamily="34" charset="-120"/>
+              </a:rPr>
+              <a:t>Tier up:</a:t>
+            </a:r>
             <a:pPr algn="l" indent="0" marL="0">
               <a:lnSpc>
-                <a:spcPts val="1680"/>
-              </a:lnSpc>
-              <a:spcBef>
-                <a:spcPts val="300"/>
-              </a:spcBef>
+                <a:spcPts val="1620"/>
+              </a:lnSpc>
               <a:spcAft>
                 <a:spcPts val="300"/>
               </a:spcAft>
@@ -2656,7 +2603,51 @@
                 <a:ea typeface="Arial" pitchFamily="34" charset="-122"/>
                 <a:cs typeface="Arial" pitchFamily="34" charset="-120"/>
               </a:rPr>
-              <a:t>– The summative is the most marked single assessment of the module. Be strict on closed-notebook BUT generous on the open-response question — student paraphrases of the algebraic identity are valid even if not perfectly phrased. – Project presentations: keep the energy up. Use stickers / acknowledgment for every pair. The presentation is partly a performance; affirm the work. – If a pair didn't finish their artefact, still let them present. The presentation itself is graded; the artefact is graded separately on the rubric. – File the quiz results AND the project rubric scores to inform pacing for next year's cohort.</a:t>
+              <a:t> If finished early on the quiz, write the algebraic identity for the Nikhilam method in full generality (for any base b).</a:t>
+            </a:r>
+            <a:endParaRPr lang="en-US" sz="1200" dirty="0"/>
+          </a:p>
+          <a:p>
+            <a:pPr algn="l" marL="342900" indent="-342900">
+              <a:lnSpc>
+                <a:spcPts val="1620"/>
+              </a:lnSpc>
+              <a:spcAft>
+                <a:spcPts val="300"/>
+              </a:spcAft>
+              <a:buSzPct val="100000"/>
+              <a:buChar char="•"/>
+            </a:pPr>
+            <a:r>
+              <a:rPr lang="en-US" sz="1200" b="1" dirty="0">
+                <a:solidFill>
+                  <a:srgbClr val="1C2833"/>
+                </a:solidFill>
+                <a:latin typeface="Arial" pitchFamily="34" charset="0"/>
+                <a:ea typeface="Arial" pitchFamily="34" charset="-122"/>
+                <a:cs typeface="Arial" pitchFamily="34" charset="-120"/>
+              </a:rPr>
+              <a:t>Tier down:</a:t>
+            </a:r>
+            <a:pPr algn="l" indent="0" marL="0">
+              <a:lnSpc>
+                <a:spcPts val="1620"/>
+              </a:lnSpc>
+              <a:spcAft>
+                <a:spcPts val="300"/>
+              </a:spcAft>
+              <a:buNone/>
+            </a:pPr>
+            <a:r>
+              <a:rPr lang="en-US" sz="1200" dirty="0">
+                <a:solidFill>
+                  <a:srgbClr val="1C2833"/>
+                </a:solidFill>
+                <a:latin typeface="Arial" pitchFamily="34" charset="0"/>
+                <a:ea typeface="Arial" pitchFamily="34" charset="-122"/>
+                <a:cs typeface="Arial" pitchFamily="34" charset="-120"/>
+              </a:rPr>
+              <a:t> Extra 5 min on the quiz allowed for slow processors; quiet pull-aside support.</a:t>
             </a:r>
             <a:endParaRPr lang="en-US" sz="1200" dirty="0"/>
           </a:p>
@@ -2814,7 +2805,7 @@
                 <a:ea typeface="Georgia" pitchFamily="34" charset="-122"/>
                 <a:cs typeface="Georgia" pitchFamily="34" charset="-120"/>
               </a:rPr>
-              <a:t>Citation(s) used in this lesson</a:t>
+              <a:t>Teacher notes</a:t>
             </a:r>
             <a:endParaRPr lang="en-US" sz="1800" dirty="0"/>
           </a:p>
@@ -2828,8 +2819,8 @@
         </p:nvSpPr>
         <p:spPr>
           <a:xfrm>
-            <a:off x="406301" y="870942"/>
-            <a:ext cx="8498026" cy="213271"/>
+            <a:off x="634901" y="883593"/>
+            <a:ext cx="8102798" cy="1630263"/>
           </a:xfrm>
           <a:prstGeom prst="rect">
             <a:avLst/>
@@ -2841,6 +2832,124 @@
           <a:bodyPr wrap="square" lIns="0" tIns="0" rIns="0" bIns="0" rtlCol="0" anchor="t"/>
           <a:lstStyle/>
           <a:p>
+            <a:pPr algn="l" marL="342900" indent="-342900">
+              <a:lnSpc>
+                <a:spcPts val="1620"/>
+              </a:lnSpc>
+              <a:spcAft>
+                <a:spcPts val="300"/>
+              </a:spcAft>
+              <a:buSzPct val="100000"/>
+              <a:buChar char="•"/>
+            </a:pPr>
+            <a:r>
+              <a:rPr lang="en-US" sz="1200" dirty="0">
+                <a:solidFill>
+                  <a:srgbClr val="1C2833"/>
+                </a:solidFill>
+                <a:latin typeface="Arial" pitchFamily="34" charset="0"/>
+                <a:ea typeface="Arial" pitchFamily="34" charset="-122"/>
+                <a:cs typeface="Arial" pitchFamily="34" charset="-120"/>
+              </a:rPr>
+              <a:t>The summative is the most marked single assessment of the module. Be strict on closed-notebook BUT generous on the open-response question — student paraphrases of the algebraic identity are valid even if not perfectly phrased.</a:t>
+            </a:r>
+            <a:endParaRPr lang="en-US" sz="1200" dirty="0"/>
+          </a:p>
+          <a:p>
+            <a:pPr algn="l" marL="342900" indent="-342900">
+              <a:lnSpc>
+                <a:spcPts val="1620"/>
+              </a:lnSpc>
+              <a:spcAft>
+                <a:spcPts val="300"/>
+              </a:spcAft>
+              <a:buSzPct val="100000"/>
+              <a:buChar char="•"/>
+            </a:pPr>
+            <a:r>
+              <a:rPr lang="en-US" sz="1200" dirty="0">
+                <a:solidFill>
+                  <a:srgbClr val="1C2833"/>
+                </a:solidFill>
+                <a:latin typeface="Arial" pitchFamily="34" charset="0"/>
+                <a:ea typeface="Arial" pitchFamily="34" charset="-122"/>
+                <a:cs typeface="Arial" pitchFamily="34" charset="-120"/>
+              </a:rPr>
+              <a:t>Project presentations: keep the energy up. Use stickers / acknowledgment for every pair. The presentation is partly a performance; affirm the work.</a:t>
+            </a:r>
+            <a:endParaRPr lang="en-US" sz="1200" dirty="0"/>
+          </a:p>
+          <a:p>
+            <a:pPr algn="l" marL="342900" indent="-342900">
+              <a:lnSpc>
+                <a:spcPts val="1620"/>
+              </a:lnSpc>
+              <a:spcAft>
+                <a:spcPts val="300"/>
+              </a:spcAft>
+              <a:buSzPct val="100000"/>
+              <a:buChar char="•"/>
+            </a:pPr>
+            <a:r>
+              <a:rPr lang="en-US" sz="1200" dirty="0">
+                <a:solidFill>
+                  <a:srgbClr val="1C2833"/>
+                </a:solidFill>
+                <a:latin typeface="Arial" pitchFamily="34" charset="0"/>
+                <a:ea typeface="Arial" pitchFamily="34" charset="-122"/>
+                <a:cs typeface="Arial" pitchFamily="34" charset="-120"/>
+              </a:rPr>
+              <a:t>If a pair didn't finish their artefact, still let them present. The presentation itself is graded; the artefact is graded separately on the rubric.</a:t>
+            </a:r>
+            <a:endParaRPr lang="en-US" sz="1200" dirty="0"/>
+          </a:p>
+          <a:p>
+            <a:pPr algn="l" marL="342900" indent="-342900">
+              <a:lnSpc>
+                <a:spcPts val="1620"/>
+              </a:lnSpc>
+              <a:spcAft>
+                <a:spcPts val="300"/>
+              </a:spcAft>
+              <a:buSzPct val="100000"/>
+              <a:buChar char="•"/>
+            </a:pPr>
+            <a:r>
+              <a:rPr lang="en-US" sz="1200" dirty="0">
+                <a:solidFill>
+                  <a:srgbClr val="1C2833"/>
+                </a:solidFill>
+                <a:latin typeface="Arial" pitchFamily="34" charset="0"/>
+                <a:ea typeface="Arial" pitchFamily="34" charset="-122"/>
+                <a:cs typeface="Arial" pitchFamily="34" charset="-120"/>
+              </a:rPr>
+              <a:t>File the quiz results AND the project rubric scores to inform pacing for next year's cohort.</a:t>
+            </a:r>
+            <a:endParaRPr lang="en-US" sz="1200" dirty="0"/>
+          </a:p>
+        </p:txBody>
+      </p:sp>
+      <p:sp>
+        <p:nvSpPr>
+          <p:cNvPr id="5" name="Text 3"/>
+          <p:cNvSpPr/>
+          <p:nvPr/>
+        </p:nvSpPr>
+        <p:spPr>
+          <a:xfrm>
+            <a:off x="406301" y="4434929"/>
+            <a:ext cx="8498026" cy="213271"/>
+          </a:xfrm>
+          <a:prstGeom prst="rect">
+            <a:avLst/>
+          </a:prstGeom>
+          <a:noFill/>
+          <a:ln/>
+        </p:spPr>
+        <p:txBody>
+          <a:bodyPr wrap="square" lIns="0" tIns="0" rIns="0" bIns="0" rtlCol="0" anchor="t"/>
+          <a:lstStyle/>
+          <a:p>
             <a:pPr algn="l" indent="0" marL="0">
               <a:lnSpc>
                 <a:spcPts val="1680"/>
@@ -2862,16 +2971,169 @@
                 <a:ea typeface="Arial" pitchFamily="34" charset="-122"/>
                 <a:cs typeface="Arial" pitchFamily="34" charset="-120"/>
               </a:rPr>
-              <a:t>– Tirthaji, </a:t>
-            </a:r>
+              <a:t>Middle ·  · IKS Curriculum</a:t>
+            </a:r>
+            <a:endParaRPr lang="en-US" sz="1200" dirty="0"/>
+          </a:p>
+        </p:txBody>
+      </p:sp>
+    </p:spTree>
+  </p:cSld>
+  <p:clrMapOvr>
+    <a:masterClrMapping/>
+  </p:clrMapOvr>
+</p:sld>
+</file>
+
+<file path=ppt/slides/slide13.xml><?xml version="1.0" encoding="utf-8"?>
+<p:sld xmlns:a="http://schemas.openxmlformats.org/drawingml/2006/main" xmlns:r="http://schemas.openxmlformats.org/officeDocument/2006/relationships" xmlns:p="http://schemas.openxmlformats.org/presentationml/2006/main">
+  <p:cSld name="Slide 13">
+    <p:bg>
+      <p:bgPr>
+        <a:solidFill>
+          <a:srgbClr val="FFFFFF"/>
+        </a:solidFill>
+      </p:bgPr>
+    </p:bg>
+    <p:spTree>
+      <p:nvGrpSpPr>
+        <p:cNvPr id="1" name=""/>
+        <p:cNvGrpSpPr/>
+        <p:nvPr/>
+      </p:nvGrpSpPr>
+      <p:grpSpPr>
+        <a:xfrm>
+          <a:off x="0" y="0"/>
+          <a:ext cx="0" cy="0"/>
+          <a:chOff x="0" y="0"/>
+          <a:chExt cx="0" cy="0"/>
+        </a:xfrm>
+      </p:grpSpPr>
+      <p:sp>
+        <p:nvSpPr>
+          <p:cNvPr id="2" name="Text 0"/>
+          <p:cNvSpPr/>
+          <p:nvPr/>
+        </p:nvSpPr>
+        <p:spPr>
+          <a:xfrm>
+            <a:off x="0" y="0"/>
+            <a:ext cx="9144000" cy="101501"/>
+          </a:xfrm>
+          <a:prstGeom prst="rect">
+            <a:avLst/>
+          </a:prstGeom>
+          <a:solidFill>
+            <a:srgbClr val="277884"/>
+          </a:solidFill>
+          <a:ln/>
+        </p:spPr>
+        <p:txBody>
+          <a:bodyPr wrap="square" rtlCol="0" anchor="ctr"/>
+          <a:lstStyle/>
+          <a:p>
+            <a:pPr indent="0" marL="0">
+              <a:buNone/>
+            </a:pPr>
+            <a:endParaRPr lang="en-US" dirty="0"/>
+          </a:p>
+        </p:txBody>
+      </p:sp>
+      <p:sp>
+        <p:nvSpPr>
+          <p:cNvPr id="3" name="Text 1"/>
+          <p:cNvSpPr/>
+          <p:nvPr/>
+        </p:nvSpPr>
+        <p:spPr>
+          <a:xfrm>
+            <a:off x="406301" y="457051"/>
+            <a:ext cx="8498026" cy="274290"/>
+          </a:xfrm>
+          <a:prstGeom prst="rect">
+            <a:avLst/>
+          </a:prstGeom>
+          <a:noFill/>
+          <a:ln/>
+        </p:spPr>
+        <p:txBody>
+          <a:bodyPr wrap="square" lIns="0" tIns="0" rIns="0" bIns="0" rtlCol="0" anchor="t"/>
+          <a:lstStyle/>
+          <a:p>
             <a:pPr algn="l" indent="0" marL="0">
               <a:lnSpc>
-                <a:spcPts val="1680"/>
+                <a:spcPts val="2160"/>
               </a:lnSpc>
               <a:spcBef>
-                <a:spcPts val="300"/>
+                <a:spcPts val="600"/>
               </a:spcBef>
               <a:spcAft>
+                <a:spcPts val="800"/>
+              </a:spcAft>
+              <a:buNone/>
+            </a:pPr>
+            <a:r>
+              <a:rPr lang="en-US" sz="1800" b="1" dirty="0">
+                <a:solidFill>
+                  <a:srgbClr val="FE4447"/>
+                </a:solidFill>
+                <a:latin typeface="Georgia" pitchFamily="34" charset="0"/>
+                <a:ea typeface="Georgia" pitchFamily="34" charset="-122"/>
+                <a:cs typeface="Georgia" pitchFamily="34" charset="-120"/>
+              </a:rPr>
+              <a:t>Citation(s) used in this lesson</a:t>
+            </a:r>
+            <a:endParaRPr lang="en-US" sz="1800" dirty="0"/>
+          </a:p>
+        </p:txBody>
+      </p:sp>
+      <p:sp>
+        <p:nvSpPr>
+          <p:cNvPr id="4" name="Text 2"/>
+          <p:cNvSpPr/>
+          <p:nvPr/>
+        </p:nvSpPr>
+        <p:spPr>
+          <a:xfrm>
+            <a:off x="634901" y="883593"/>
+            <a:ext cx="8102798" cy="281880"/>
+          </a:xfrm>
+          <a:prstGeom prst="rect">
+            <a:avLst/>
+          </a:prstGeom>
+          <a:noFill/>
+          <a:ln/>
+        </p:spPr>
+        <p:txBody>
+          <a:bodyPr wrap="square" lIns="0" tIns="0" rIns="0" bIns="0" rtlCol="0" anchor="t"/>
+          <a:lstStyle/>
+          <a:p>
+            <a:pPr algn="l" marL="342900" indent="-342900">
+              <a:lnSpc>
+                <a:spcPts val="1620"/>
+              </a:lnSpc>
+              <a:spcAft>
+                <a:spcPts val="300"/>
+              </a:spcAft>
+              <a:buSzPct val="100000"/>
+              <a:buChar char="•"/>
+            </a:pPr>
+            <a:r>
+              <a:rPr lang="en-US" sz="1200" dirty="0">
+                <a:solidFill>
+                  <a:srgbClr val="1C2833"/>
+                </a:solidFill>
+                <a:latin typeface="Arial" pitchFamily="34" charset="0"/>
+                <a:ea typeface="Arial" pitchFamily="34" charset="-122"/>
+                <a:cs typeface="Arial" pitchFamily="34" charset="-120"/>
+              </a:rPr>
+              <a:t>Tirthaji, </a:t>
+            </a:r>
+            <a:pPr algn="l" indent="0" marL="0">
+              <a:lnSpc>
+                <a:spcPts val="1620"/>
+              </a:lnSpc>
+              <a:spcAft>
                 <a:spcPts val="300"/>
               </a:spcAft>
               <a:buNone/>
@@ -2889,11 +3151,8 @@
             </a:r>
             <a:pPr algn="l" indent="0" marL="0">
               <a:lnSpc>
-                <a:spcPts val="1680"/>
-              </a:lnSpc>
-              <a:spcBef>
-                <a:spcPts val="300"/>
-              </a:spcBef>
+                <a:spcPts val="1620"/>
+              </a:lnSpc>
               <a:spcAft>
                 <a:spcPts val="300"/>
               </a:spcAft>
@@ -3066,7 +3325,7 @@
                 <a:ea typeface="Georgia" pitchFamily="34" charset="-122"/>
                 <a:cs typeface="Georgia" pitchFamily="34" charset="-120"/>
               </a:rPr>
-              <a:t>Materials</a:t>
+              <a:t>Learning objective</a:t>
             </a:r>
             <a:endParaRPr lang="en-US" sz="1800" dirty="0"/>
           </a:p>
@@ -3080,8 +3339,8 @@
         </p:nvSpPr>
         <p:spPr>
           <a:xfrm>
-            <a:off x="634901" y="883593"/>
-            <a:ext cx="8102798" cy="300930"/>
+            <a:off x="406301" y="870942"/>
+            <a:ext cx="8498026" cy="426541"/>
           </a:xfrm>
           <a:prstGeom prst="rect">
             <a:avLst/>
@@ -3093,15 +3352,17 @@
           <a:bodyPr wrap="square" lIns="0" tIns="0" rIns="0" bIns="0" rtlCol="0" anchor="t"/>
           <a:lstStyle/>
           <a:p>
-            <a:pPr algn="l" marL="342900" indent="-342900">
-              <a:lnSpc>
-                <a:spcPts val="1620"/>
-              </a:lnSpc>
-              <a:spcAft>
-                <a:spcPts val="300"/>
-              </a:spcAft>
-              <a:buSzPct val="100000"/>
-              <a:buChar char="•"/>
+            <a:pPr algn="l" indent="0" marL="0">
+              <a:lnSpc>
+                <a:spcPts val="1680"/>
+              </a:lnSpc>
+              <a:spcBef>
+                <a:spcPts val="300"/>
+              </a:spcBef>
+              <a:spcAft>
+                <a:spcPts val="300"/>
+              </a:spcAft>
+              <a:buNone/>
             </a:pPr>
             <a:r>
               <a:rPr lang="en-US" sz="1200" dirty="0">
@@ -3112,27 +3373,7 @@
                 <a:ea typeface="Arial" pitchFamily="34" charset="-122"/>
                 <a:cs typeface="Arial" pitchFamily="34" charset="-120"/>
               </a:rPr>
-              <a:t>quizzes/summative.md</a:t>
-            </a:r>
-            <a:pPr algn="l" indent="0" marL="0">
-              <a:lnSpc>
-                <a:spcPts val="1620"/>
-              </a:lnSpc>
-              <a:spcAft>
-                <a:spcPts val="300"/>
-              </a:spcAft>
-              <a:buNone/>
-            </a:pPr>
-            <a:r>
-              <a:rPr lang="en-US" sz="1200" dirty="0">
-                <a:solidFill>
-                  <a:srgbClr val="1C2833"/>
-                </a:solidFill>
-                <a:latin typeface="Arial" pitchFamily="34" charset="0"/>
-                <a:ea typeface="Arial" pitchFamily="34" charset="-122"/>
-                <a:cs typeface="Arial" pitchFamily="34" charset="-120"/>
-              </a:rPr>
-              <a:t> (printed, one per student)</a:t>
+              <a:t>By the end of this lesson, students will complete the summative quiz, present their project artefact in 3 minutes, and submit a brief written self-reflection.</a:t>
             </a:r>
             <a:endParaRPr lang="en-US" sz="1200" dirty="0"/>
           </a:p>
@@ -3141,54 +3382,6 @@
       <p:sp>
         <p:nvSpPr>
           <p:cNvPr id="5" name="Text 3"/>
-          <p:cNvSpPr/>
-          <p:nvPr/>
-        </p:nvSpPr>
-        <p:spPr>
-          <a:xfrm>
-            <a:off x="406301" y="1273373"/>
-            <a:ext cx="8498026" cy="426541"/>
-          </a:xfrm>
-          <a:prstGeom prst="rect">
-            <a:avLst/>
-          </a:prstGeom>
-          <a:noFill/>
-          <a:ln/>
-        </p:spPr>
-        <p:txBody>
-          <a:bodyPr wrap="square" lIns="0" tIns="0" rIns="0" bIns="0" rtlCol="0" anchor="t"/>
-          <a:lstStyle/>
-          <a:p>
-            <a:pPr algn="l" indent="0" marL="0">
-              <a:lnSpc>
-                <a:spcPts val="1680"/>
-              </a:lnSpc>
-              <a:spcBef>
-                <a:spcPts val="300"/>
-              </a:spcBef>
-              <a:spcAft>
-                <a:spcPts val="300"/>
-              </a:spcAft>
-              <a:buNone/>
-            </a:pPr>
-            <a:r>
-              <a:rPr lang="en-US" sz="1200" dirty="0">
-                <a:solidFill>
-                  <a:srgbClr val="1C2833"/>
-                </a:solidFill>
-                <a:latin typeface="Arial" pitchFamily="34" charset="0"/>
-                <a:ea typeface="Arial" pitchFamily="34" charset="-122"/>
-                <a:cs typeface="Arial" pitchFamily="34" charset="-120"/>
-              </a:rPr>
-              <a:t>– Stopwatch for project presentations – Camera (phone) for documenting projects, if permitted by school policy – Stickers for completion (optional, but motivating)</a:t>
-            </a:r>
-            <a:endParaRPr lang="en-US" sz="1200" dirty="0"/>
-          </a:p>
-        </p:txBody>
-      </p:sp>
-      <p:sp>
-        <p:nvSpPr>
-          <p:cNvPr id="6" name="Text 4"/>
           <p:cNvSpPr/>
           <p:nvPr/>
         </p:nvSpPr>
@@ -3338,7 +3531,7 @@
                 <a:ea typeface="Georgia" pitchFamily="34" charset="-122"/>
                 <a:cs typeface="Georgia" pitchFamily="34" charset="-120"/>
               </a:rPr>
-              <a:t>Lesson flow</a:t>
+              <a:t>Materials</a:t>
             </a:r>
             <a:endParaRPr lang="en-US" sz="1800" dirty="0"/>
           </a:p>
@@ -3347,6 +3540,144 @@
       <p:sp>
         <p:nvSpPr>
           <p:cNvPr id="4" name="Text 2"/>
+          <p:cNvSpPr/>
+          <p:nvPr/>
+        </p:nvSpPr>
+        <p:spPr>
+          <a:xfrm>
+            <a:off x="634901" y="883593"/>
+            <a:ext cx="8102798" cy="1032272"/>
+          </a:xfrm>
+          <a:prstGeom prst="rect">
+            <a:avLst/>
+          </a:prstGeom>
+          <a:noFill/>
+          <a:ln/>
+        </p:spPr>
+        <p:txBody>
+          <a:bodyPr wrap="square" lIns="0" tIns="0" rIns="0" bIns="0" rtlCol="0" anchor="t"/>
+          <a:lstStyle/>
+          <a:p>
+            <a:pPr algn="l" marL="342900" indent="-342900">
+              <a:lnSpc>
+                <a:spcPts val="1620"/>
+              </a:lnSpc>
+              <a:spcAft>
+                <a:spcPts val="300"/>
+              </a:spcAft>
+              <a:buSzPct val="100000"/>
+              <a:buChar char="•"/>
+            </a:pPr>
+            <a:r>
+              <a:rPr lang="en-US" sz="1200" dirty="0">
+                <a:solidFill>
+                  <a:srgbClr val="1C2833"/>
+                </a:solidFill>
+                <a:latin typeface="Arial" pitchFamily="34" charset="0"/>
+                <a:ea typeface="Arial" pitchFamily="34" charset="-122"/>
+                <a:cs typeface="Arial" pitchFamily="34" charset="-120"/>
+              </a:rPr>
+              <a:t>quizzes/summative.md</a:t>
+            </a:r>
+            <a:pPr algn="l" indent="0" marL="0">
+              <a:lnSpc>
+                <a:spcPts val="1620"/>
+              </a:lnSpc>
+              <a:spcAft>
+                <a:spcPts val="300"/>
+              </a:spcAft>
+              <a:buNone/>
+            </a:pPr>
+            <a:r>
+              <a:rPr lang="en-US" sz="1200" dirty="0">
+                <a:solidFill>
+                  <a:srgbClr val="1C2833"/>
+                </a:solidFill>
+                <a:latin typeface="Arial" pitchFamily="34" charset="0"/>
+                <a:ea typeface="Arial" pitchFamily="34" charset="-122"/>
+                <a:cs typeface="Arial" pitchFamily="34" charset="-120"/>
+              </a:rPr>
+              <a:t> (printed, one per student)</a:t>
+            </a:r>
+            <a:endParaRPr lang="en-US" sz="1200" dirty="0"/>
+          </a:p>
+          <a:p>
+            <a:pPr algn="l" marL="342900" indent="-342900">
+              <a:lnSpc>
+                <a:spcPts val="1620"/>
+              </a:lnSpc>
+              <a:spcAft>
+                <a:spcPts val="300"/>
+              </a:spcAft>
+              <a:buSzPct val="100000"/>
+              <a:buChar char="•"/>
+            </a:pPr>
+            <a:r>
+              <a:rPr lang="en-US" sz="1200" dirty="0">
+                <a:solidFill>
+                  <a:srgbClr val="1C2833"/>
+                </a:solidFill>
+                <a:latin typeface="Arial" pitchFamily="34" charset="0"/>
+                <a:ea typeface="Arial" pitchFamily="34" charset="-122"/>
+                <a:cs typeface="Arial" pitchFamily="34" charset="-120"/>
+              </a:rPr>
+              <a:t>Stopwatch for project presentations</a:t>
+            </a:r>
+            <a:endParaRPr lang="en-US" sz="1200" dirty="0"/>
+          </a:p>
+          <a:p>
+            <a:pPr algn="l" marL="342900" indent="-342900">
+              <a:lnSpc>
+                <a:spcPts val="1620"/>
+              </a:lnSpc>
+              <a:spcAft>
+                <a:spcPts val="300"/>
+              </a:spcAft>
+              <a:buSzPct val="100000"/>
+              <a:buChar char="•"/>
+            </a:pPr>
+            <a:r>
+              <a:rPr lang="en-US" sz="1200" dirty="0">
+                <a:solidFill>
+                  <a:srgbClr val="1C2833"/>
+                </a:solidFill>
+                <a:latin typeface="Arial" pitchFamily="34" charset="0"/>
+                <a:ea typeface="Arial" pitchFamily="34" charset="-122"/>
+                <a:cs typeface="Arial" pitchFamily="34" charset="-120"/>
+              </a:rPr>
+              <a:t>Camera (phone) for documenting projects, if permitted by school policy</a:t>
+            </a:r>
+            <a:endParaRPr lang="en-US" sz="1200" dirty="0"/>
+          </a:p>
+          <a:p>
+            <a:pPr algn="l" marL="342900" indent="-342900">
+              <a:lnSpc>
+                <a:spcPts val="1620"/>
+              </a:lnSpc>
+              <a:spcAft>
+                <a:spcPts val="300"/>
+              </a:spcAft>
+              <a:buSzPct val="100000"/>
+              <a:buChar char="•"/>
+            </a:pPr>
+            <a:r>
+              <a:rPr lang="en-US" sz="1200" dirty="0">
+                <a:solidFill>
+                  <a:srgbClr val="1C2833"/>
+                </a:solidFill>
+                <a:latin typeface="Arial" pitchFamily="34" charset="0"/>
+                <a:ea typeface="Arial" pitchFamily="34" charset="-122"/>
+                <a:cs typeface="Arial" pitchFamily="34" charset="-120"/>
+              </a:rPr>
+              <a:t>Stickers for completion (optional, but motivating)</a:t>
+            </a:r>
+            <a:endParaRPr lang="en-US" sz="1200" dirty="0"/>
+          </a:p>
+        </p:txBody>
+      </p:sp>
+      <p:sp>
+        <p:nvSpPr>
+          <p:cNvPr id="5" name="Text 3"/>
           <p:cNvSpPr/>
           <p:nvPr/>
         </p:nvSpPr>
@@ -3496,7 +3827,7 @@
                 <a:ea typeface="Georgia" pitchFamily="34" charset="-122"/>
                 <a:cs typeface="Georgia" pitchFamily="34" charset="-120"/>
               </a:rPr>
-              <a:t>Warm-up (3 min)</a:t>
+              <a:t>Lesson flow</a:t>
             </a:r>
             <a:endParaRPr lang="en-US" sz="1800" dirty="0"/>
           </a:p>
@@ -3505,123 +3836,6 @@
       <p:sp>
         <p:nvSpPr>
           <p:cNvPr id="4" name="Text 2"/>
-          <p:cNvSpPr/>
-          <p:nvPr/>
-        </p:nvSpPr>
-        <p:spPr>
-          <a:xfrm>
-            <a:off x="406301" y="870942"/>
-            <a:ext cx="8498026" cy="426541"/>
-          </a:xfrm>
-          <a:prstGeom prst="rect">
-            <a:avLst/>
-          </a:prstGeom>
-          <a:noFill/>
-          <a:ln/>
-        </p:spPr>
-        <p:txBody>
-          <a:bodyPr wrap="square" lIns="0" tIns="0" rIns="0" bIns="0" rtlCol="0" anchor="t"/>
-          <a:lstStyle/>
-          <a:p>
-            <a:pPr algn="l" indent="0" marL="0">
-              <a:lnSpc>
-                <a:spcPts val="1680"/>
-              </a:lnSpc>
-              <a:spcBef>
-                <a:spcPts val="300"/>
-              </a:spcBef>
-              <a:spcAft>
-                <a:spcPts val="300"/>
-              </a:spcAft>
-              <a:buNone/>
-            </a:pPr>
-            <a:r>
-              <a:rPr lang="en-US" sz="1200" dirty="0">
-                <a:solidFill>
-                  <a:srgbClr val="1C2833"/>
-                </a:solidFill>
-                <a:latin typeface="Arial" pitchFamily="34" charset="0"/>
-                <a:ea typeface="Arial" pitchFamily="34" charset="-122"/>
-                <a:cs typeface="Arial" pitchFamily="34" charset="-120"/>
-              </a:rPr>
-              <a:t>– Final sūtra recitation, in unison, from memory — </a:t>
-            </a:r>
-            <a:pPr algn="l" indent="0" marL="0">
-              <a:lnSpc>
-                <a:spcPts val="1680"/>
-              </a:lnSpc>
-              <a:spcBef>
-                <a:spcPts val="300"/>
-              </a:spcBef>
-              <a:spcAft>
-                <a:spcPts val="300"/>
-              </a:spcAft>
-              <a:buNone/>
-            </a:pPr>
-            <a:r>
-              <a:rPr lang="en-US" sz="1200" i="1" dirty="0">
-                <a:solidFill>
-                  <a:srgbClr val="1C2833"/>
-                </a:solidFill>
-                <a:latin typeface="Arial" pitchFamily="34" charset="0"/>
-                <a:ea typeface="Arial" pitchFamily="34" charset="-122"/>
-                <a:cs typeface="Arial" pitchFamily="34" charset="-120"/>
-              </a:rPr>
-              <a:t>Nikhilaṁ Navataścaramaṁ Daśataḥ.</a:t>
-            </a:r>
-            <a:pPr algn="l" indent="0" marL="0">
-              <a:lnSpc>
-                <a:spcPts val="1680"/>
-              </a:lnSpc>
-              <a:spcBef>
-                <a:spcPts val="300"/>
-              </a:spcBef>
-              <a:spcAft>
-                <a:spcPts val="300"/>
-              </a:spcAft>
-              <a:buNone/>
-            </a:pPr>
-            <a:r>
-              <a:rPr lang="en-US" sz="1200" dirty="0">
-                <a:solidFill>
-                  <a:srgbClr val="1C2833"/>
-                </a:solidFill>
-                <a:latin typeface="Arial" pitchFamily="34" charset="0"/>
-                <a:ea typeface="Arial" pitchFamily="34" charset="-122"/>
-                <a:cs typeface="Arial" pitchFamily="34" charset="-120"/>
-              </a:rPr>
-              <a:t> – One sentence each, going around the room: </a:t>
-            </a:r>
-            <a:pPr algn="l" indent="0" marL="0">
-              <a:lnSpc>
-                <a:spcPts val="1680"/>
-              </a:lnSpc>
-              <a:spcBef>
-                <a:spcPts val="300"/>
-              </a:spcBef>
-              <a:spcAft>
-                <a:spcPts val="300"/>
-              </a:spcAft>
-              <a:buNone/>
-            </a:pPr>
-            <a:r>
-              <a:rPr lang="en-US" sz="1200" i="1" dirty="0">
-                <a:solidFill>
-                  <a:srgbClr val="1C2833"/>
-                </a:solidFill>
-                <a:latin typeface="Arial" pitchFamily="34" charset="0"/>
-                <a:ea typeface="Arial" pitchFamily="34" charset="-122"/>
-                <a:cs typeface="Arial" pitchFamily="34" charset="-120"/>
-              </a:rPr>
-              <a:t>"The one thing I'll remember from this module is..."</a:t>
-            </a:r>
-            <a:endParaRPr lang="en-US" sz="1200" dirty="0"/>
-          </a:p>
-        </p:txBody>
-      </p:sp>
-      <p:sp>
-        <p:nvSpPr>
-          <p:cNvPr id="5" name="Text 3"/>
           <p:cNvSpPr/>
           <p:nvPr/>
         </p:nvSpPr>
@@ -3771,7 +3985,7 @@
                 <a:ea typeface="Georgia" pitchFamily="34" charset="-122"/>
                 <a:cs typeface="Georgia" pitchFamily="34" charset="-120"/>
               </a:rPr>
-              <a:t>Summative quiz (20 min)</a:t>
+              <a:t>Warm-up (3 min)</a:t>
             </a:r>
             <a:endParaRPr lang="en-US" sz="1800" dirty="0"/>
           </a:p>
@@ -3785,8 +3999,8 @@
         </p:nvSpPr>
         <p:spPr>
           <a:xfrm>
-            <a:off x="406301" y="870942"/>
-            <a:ext cx="8498026" cy="649337"/>
+            <a:off x="634901" y="883593"/>
+            <a:ext cx="8102798" cy="525661"/>
           </a:xfrm>
           <a:prstGeom prst="rect">
             <a:avLst/>
@@ -3798,17 +4012,59 @@
           <a:bodyPr wrap="square" lIns="0" tIns="0" rIns="0" bIns="0" rtlCol="0" anchor="t"/>
           <a:lstStyle/>
           <a:p>
+            <a:pPr algn="l" marL="342900" indent="-342900">
+              <a:lnSpc>
+                <a:spcPts val="1620"/>
+              </a:lnSpc>
+              <a:spcAft>
+                <a:spcPts val="300"/>
+              </a:spcAft>
+              <a:buSzPct val="100000"/>
+              <a:buChar char="•"/>
+            </a:pPr>
+            <a:r>
+              <a:rPr lang="en-US" sz="1200" dirty="0">
+                <a:solidFill>
+                  <a:srgbClr val="1C2833"/>
+                </a:solidFill>
+                <a:latin typeface="Arial" pitchFamily="34" charset="0"/>
+                <a:ea typeface="Arial" pitchFamily="34" charset="-122"/>
+                <a:cs typeface="Arial" pitchFamily="34" charset="-120"/>
+              </a:rPr>
+              <a:t>Final sūtra recitation, in unison, from memory — </a:t>
+            </a:r>
             <a:pPr algn="l" indent="0" marL="0">
               <a:lnSpc>
-                <a:spcPts val="1680"/>
-              </a:lnSpc>
-              <a:spcBef>
-                <a:spcPts val="300"/>
-              </a:spcBef>
-              <a:spcAft>
-                <a:spcPts val="300"/>
-              </a:spcAft>
-              <a:buNone/>
+                <a:spcPts val="1620"/>
+              </a:lnSpc>
+              <a:spcAft>
+                <a:spcPts val="300"/>
+              </a:spcAft>
+              <a:buNone/>
+            </a:pPr>
+            <a:r>
+              <a:rPr lang="en-US" sz="1200" i="1" dirty="0">
+                <a:solidFill>
+                  <a:srgbClr val="1C2833"/>
+                </a:solidFill>
+                <a:latin typeface="Arial" pitchFamily="34" charset="0"/>
+                <a:ea typeface="Arial" pitchFamily="34" charset="-122"/>
+                <a:cs typeface="Arial" pitchFamily="34" charset="-120"/>
+              </a:rPr>
+              <a:t>Nikhilaṁ Navataścaramaṁ Daśataḥ.</a:t>
+            </a:r>
+            <a:endParaRPr lang="en-US" sz="1200" dirty="0"/>
+          </a:p>
+          <a:p>
+            <a:pPr algn="l" marL="342900" indent="-342900">
+              <a:lnSpc>
+                <a:spcPts val="1620"/>
+              </a:lnSpc>
+              <a:spcAft>
+                <a:spcPts val="300"/>
+              </a:spcAft>
+              <a:buSzPct val="100000"/>
+              <a:buChar char="•"/>
             </a:pPr>
             <a:r>
               <a:rPr lang="en-US" sz="1200" dirty="0">
@@ -3819,53 +4075,27 @@
                 <a:ea typeface="Arial" pitchFamily="34" charset="-122"/>
                 <a:cs typeface="Arial" pitchFamily="34" charset="-120"/>
               </a:rPr>
-              <a:t>– Closed notebook. – 25 marks. Sections: complement recall, subtraction practice, general subtraction, conceptual short answer, open response on "why it works." See </a:t>
+              <a:t>One sentence each, going around the room: </a:t>
             </a:r>
             <a:pPr algn="l" indent="0" marL="0">
               <a:lnSpc>
-                <a:spcPts val="1680"/>
-              </a:lnSpc>
-              <a:spcBef>
-                <a:spcPts val="300"/>
-              </a:spcBef>
-              <a:spcAft>
-                <a:spcPts val="300"/>
-              </a:spcAft>
-              <a:buNone/>
-            </a:pPr>
-            <a:r>
-              <a:rPr lang="en-US" sz="1200" dirty="0">
-                <a:solidFill>
-                  <a:srgbClr val="1C2833"/>
-                </a:solidFill>
-                <a:latin typeface="Arial" pitchFamily="34" charset="0"/>
-                <a:ea typeface="Arial" pitchFamily="34" charset="-122"/>
-                <a:cs typeface="Arial" pitchFamily="34" charset="-120"/>
-              </a:rPr>
-              <a:t>quizzes/summative.md</a:t>
-            </a:r>
-            <a:pPr algn="l" indent="0" marL="0">
-              <a:lnSpc>
-                <a:spcPts val="1680"/>
-              </a:lnSpc>
-              <a:spcBef>
-                <a:spcPts val="300"/>
-              </a:spcBef>
-              <a:spcAft>
-                <a:spcPts val="300"/>
-              </a:spcAft>
-              <a:buNone/>
-            </a:pPr>
-            <a:r>
-              <a:rPr lang="en-US" sz="1200" dirty="0">
-                <a:solidFill>
-                  <a:srgbClr val="1C2833"/>
-                </a:solidFill>
-                <a:latin typeface="Arial" pitchFamily="34" charset="0"/>
-                <a:ea typeface="Arial" pitchFamily="34" charset="-122"/>
-                <a:cs typeface="Arial" pitchFamily="34" charset="-120"/>
-              </a:rPr>
-              <a:t>. – Strict 15-min time limit on the multiple-choice / short-answer parts; remaining time for the open response. – Collect.</a:t>
+                <a:spcPts val="1620"/>
+              </a:lnSpc>
+              <a:spcAft>
+                <a:spcPts val="300"/>
+              </a:spcAft>
+              <a:buNone/>
+            </a:pPr>
+            <a:r>
+              <a:rPr lang="en-US" sz="1200" i="1" dirty="0">
+                <a:solidFill>
+                  <a:srgbClr val="1C2833"/>
+                </a:solidFill>
+                <a:latin typeface="Arial" pitchFamily="34" charset="0"/>
+                <a:ea typeface="Arial" pitchFamily="34" charset="-122"/>
+                <a:cs typeface="Arial" pitchFamily="34" charset="-120"/>
+              </a:rPr>
+              <a:t>"The one thing I'll remember from this module is..."</a:t>
             </a:r>
             <a:endParaRPr lang="en-US" sz="1200" dirty="0"/>
           </a:p>
@@ -4023,7 +4253,7 @@
                 <a:ea typeface="Georgia" pitchFamily="34" charset="-122"/>
                 <a:cs typeface="Georgia" pitchFamily="34" charset="-120"/>
               </a:rPr>
-              <a:t>Project presentations (18 min)</a:t>
+              <a:t>Summative quiz (20 min)</a:t>
             </a:r>
             <a:endParaRPr lang="en-US" sz="1800" dirty="0"/>
           </a:p>
@@ -4037,8 +4267,8 @@
         </p:nvSpPr>
         <p:spPr>
           <a:xfrm>
-            <a:off x="406301" y="870942"/>
-            <a:ext cx="8498026" cy="853083"/>
+            <a:off x="634901" y="883593"/>
+            <a:ext cx="8102798" cy="1237952"/>
           </a:xfrm>
           <a:prstGeom prst="rect">
             <a:avLst/>
@@ -4050,13 +4280,55 @@
           <a:bodyPr wrap="square" lIns="0" tIns="0" rIns="0" bIns="0" rtlCol="0" anchor="t"/>
           <a:lstStyle/>
           <a:p>
+            <a:pPr algn="l" marL="342900" indent="-342900">
+              <a:lnSpc>
+                <a:spcPts val="1620"/>
+              </a:lnSpc>
+              <a:spcAft>
+                <a:spcPts val="300"/>
+              </a:spcAft>
+              <a:buSzPct val="100000"/>
+              <a:buChar char="•"/>
+            </a:pPr>
+            <a:r>
+              <a:rPr lang="en-US" sz="1200" dirty="0">
+                <a:solidFill>
+                  <a:srgbClr val="1C2833"/>
+                </a:solidFill>
+                <a:latin typeface="Arial" pitchFamily="34" charset="0"/>
+                <a:ea typeface="Arial" pitchFamily="34" charset="-122"/>
+                <a:cs typeface="Arial" pitchFamily="34" charset="-120"/>
+              </a:rPr>
+              <a:t>Closed notebook.</a:t>
+            </a:r>
+            <a:endParaRPr lang="en-US" sz="1200" dirty="0"/>
+          </a:p>
+          <a:p>
+            <a:pPr algn="l" marL="342900" indent="-342900">
+              <a:lnSpc>
+                <a:spcPts val="1620"/>
+              </a:lnSpc>
+              <a:spcAft>
+                <a:spcPts val="300"/>
+              </a:spcAft>
+              <a:buSzPct val="100000"/>
+              <a:buChar char="•"/>
+            </a:pPr>
+            <a:r>
+              <a:rPr lang="en-US" sz="1200" dirty="0">
+                <a:solidFill>
+                  <a:srgbClr val="1C2833"/>
+                </a:solidFill>
+                <a:latin typeface="Arial" pitchFamily="34" charset="0"/>
+                <a:ea typeface="Arial" pitchFamily="34" charset="-122"/>
+                <a:cs typeface="Arial" pitchFamily="34" charset="-120"/>
+              </a:rPr>
+              <a:t>25 marks. Sections: complement recall, subtraction practice, general subtraction, conceptual short answer, open response on "why it works." See </a:t>
+            </a:r>
             <a:pPr algn="l" indent="0" marL="0">
               <a:lnSpc>
-                <a:spcPts val="1680"/>
-              </a:lnSpc>
-              <a:spcBef>
-                <a:spcPts val="300"/>
-              </a:spcBef>
+                <a:spcPts val="1620"/>
+              </a:lnSpc>
               <a:spcAft>
                 <a:spcPts val="300"/>
               </a:spcAft>
@@ -4071,38 +4343,12 @@
                 <a:ea typeface="Arial" pitchFamily="34" charset="-122"/>
                 <a:cs typeface="Arial" pitchFamily="34" charset="-120"/>
               </a:rPr>
-              <a:t>– Each pair presents for 3 minutes (set the timer visibly). – Format depends on artefact: - </a:t>
+              <a:t>quizzes/summative.md</a:t>
             </a:r>
             <a:pPr algn="l" indent="0" marL="0">
               <a:lnSpc>
-                <a:spcPts val="1680"/>
-              </a:lnSpc>
-              <a:spcBef>
-                <a:spcPts val="300"/>
-              </a:spcBef>
-              <a:spcAft>
-                <a:spcPts val="300"/>
-              </a:spcAft>
-              <a:buNone/>
-            </a:pPr>
-            <a:r>
-              <a:rPr lang="en-US" sz="1200" b="1" dirty="0">
-                <a:solidFill>
-                  <a:srgbClr val="1C2833"/>
-                </a:solidFill>
-                <a:latin typeface="Arial" pitchFamily="34" charset="0"/>
-                <a:ea typeface="Arial" pitchFamily="34" charset="-122"/>
-                <a:cs typeface="Arial" pitchFamily="34" charset="-120"/>
-              </a:rPr>
-              <a:t>Shopkeeper chart:</a:t>
-            </a:r>
-            <a:pPr algn="l" indent="0" marL="0">
-              <a:lnSpc>
-                <a:spcPts val="1680"/>
-              </a:lnSpc>
-              <a:spcBef>
-                <a:spcPts val="300"/>
-              </a:spcBef>
+                <a:spcPts val="1620"/>
+              </a:lnSpc>
               <a:spcAft>
                 <a:spcPts val="300"/>
               </a:spcAft>
@@ -4117,42 +4363,20 @@
                 <a:ea typeface="Arial" pitchFamily="34" charset="-122"/>
                 <a:cs typeface="Arial" pitchFamily="34" charset="-120"/>
               </a:rPr>
-              <a:t> Pair demos using pretend currency on a real scenario. - </a:t>
-            </a:r>
-            <a:pPr algn="l" indent="0" marL="0">
-              <a:lnSpc>
-                <a:spcPts val="1680"/>
-              </a:lnSpc>
-              <a:spcBef>
-                <a:spcPts val="300"/>
-              </a:spcBef>
-              <a:spcAft>
-                <a:spcPts val="300"/>
-              </a:spcAft>
-              <a:buNone/>
-            </a:pPr>
-            <a:r>
-              <a:rPr lang="en-US" sz="1200" b="1" dirty="0">
-                <a:solidFill>
-                  <a:srgbClr val="1C2833"/>
-                </a:solidFill>
-                <a:latin typeface="Arial" pitchFamily="34" charset="0"/>
-                <a:ea typeface="Arial" pitchFamily="34" charset="-122"/>
-                <a:cs typeface="Arial" pitchFamily="34" charset="-120"/>
-              </a:rPr>
-              <a:t>Teaching video:</a:t>
-            </a:r>
-            <a:pPr algn="l" indent="0" marL="0">
-              <a:lnSpc>
-                <a:spcPts val="1680"/>
-              </a:lnSpc>
-              <a:spcBef>
-                <a:spcPts val="300"/>
-              </a:spcBef>
-              <a:spcAft>
-                <a:spcPts val="300"/>
-              </a:spcAft>
-              <a:buNone/>
+              <a:t>.</a:t>
+            </a:r>
+            <a:endParaRPr lang="en-US" sz="1200" dirty="0"/>
+          </a:p>
+          <a:p>
+            <a:pPr algn="l" marL="342900" indent="-342900">
+              <a:lnSpc>
+                <a:spcPts val="1620"/>
+              </a:lnSpc>
+              <a:spcAft>
+                <a:spcPts val="300"/>
+              </a:spcAft>
+              <a:buSzPct val="100000"/>
+              <a:buChar char="•"/>
             </a:pPr>
             <a:r>
               <a:rPr lang="en-US" sz="1200" dirty="0">
@@ -4163,42 +4387,20 @@
                 <a:ea typeface="Arial" pitchFamily="34" charset="-122"/>
                 <a:cs typeface="Arial" pitchFamily="34" charset="-120"/>
               </a:rPr>
-              <a:t> Pair plays the 60-sec video, then takes 90 sec of Q&amp;A. - </a:t>
-            </a:r>
-            <a:pPr algn="l" indent="0" marL="0">
-              <a:lnSpc>
-                <a:spcPts val="1680"/>
-              </a:lnSpc>
-              <a:spcBef>
-                <a:spcPts val="300"/>
-              </a:spcBef>
-              <a:spcAft>
-                <a:spcPts val="300"/>
-              </a:spcAft>
-              <a:buNone/>
-            </a:pPr>
-            <a:r>
-              <a:rPr lang="en-US" sz="1200" b="1" dirty="0">
-                <a:solidFill>
-                  <a:srgbClr val="1C2833"/>
-                </a:solidFill>
-                <a:latin typeface="Arial" pitchFamily="34" charset="0"/>
-                <a:ea typeface="Arial" pitchFamily="34" charset="-122"/>
-                <a:cs typeface="Arial" pitchFamily="34" charset="-120"/>
-              </a:rPr>
-              <a:t>Two's-complement poster:</a:t>
-            </a:r>
-            <a:pPr algn="l" indent="0" marL="0">
-              <a:lnSpc>
-                <a:spcPts val="1680"/>
-              </a:lnSpc>
-              <a:spcBef>
-                <a:spcPts val="300"/>
-              </a:spcBef>
-              <a:spcAft>
-                <a:spcPts val="300"/>
-              </a:spcAft>
-              <a:buNone/>
+              <a:t>Strict 15-min time limit on the multiple-choice / short-answer parts; remaining time for the open response.</a:t>
+            </a:r>
+            <a:endParaRPr lang="en-US" sz="1200" dirty="0"/>
+          </a:p>
+          <a:p>
+            <a:pPr algn="l" marL="342900" indent="-342900">
+              <a:lnSpc>
+                <a:spcPts val="1620"/>
+              </a:lnSpc>
+              <a:spcAft>
+                <a:spcPts val="300"/>
+              </a:spcAft>
+              <a:buSzPct val="100000"/>
+              <a:buChar char="•"/>
             </a:pPr>
             <a:r>
               <a:rPr lang="en-US" sz="1200" dirty="0">
@@ -4209,7 +4411,7 @@
                 <a:ea typeface="Arial" pitchFamily="34" charset="-122"/>
                 <a:cs typeface="Arial" pitchFamily="34" charset="-120"/>
               </a:rPr>
-              <a:t> Pair walks through the poster's argument. – Rest of class fills in a quick "feedback card" — one strength, one question.</a:t>
+              <a:t>Collect.</a:t>
             </a:r>
             <a:endParaRPr lang="en-US" sz="1200" dirty="0"/>
           </a:p>
@@ -4367,7 +4569,7 @@
                 <a:ea typeface="Georgia" pitchFamily="34" charset="-122"/>
                 <a:cs typeface="Georgia" pitchFamily="34" charset="-120"/>
               </a:rPr>
-              <a:t>Wrap-up (4 min)</a:t>
+              <a:t>Project presentations (18 min)</a:t>
             </a:r>
             <a:endParaRPr lang="en-US" sz="1800" dirty="0"/>
           </a:p>
@@ -4381,8 +4583,8 @@
         </p:nvSpPr>
         <p:spPr>
           <a:xfrm>
-            <a:off x="406301" y="870942"/>
-            <a:ext cx="8498026" cy="1066354"/>
+            <a:off x="634901" y="883593"/>
+            <a:ext cx="8102798" cy="1500783"/>
           </a:xfrm>
           <a:prstGeom prst="rect">
             <a:avLst/>
@@ -4394,13 +4596,79 @@
           <a:bodyPr wrap="square" lIns="0" tIns="0" rIns="0" bIns="0" rtlCol="0" anchor="t"/>
           <a:lstStyle/>
           <a:p>
+            <a:pPr algn="l" marL="342900" indent="-342900">
+              <a:lnSpc>
+                <a:spcPts val="1620"/>
+              </a:lnSpc>
+              <a:spcAft>
+                <a:spcPts val="300"/>
+              </a:spcAft>
+              <a:buSzPct val="100000"/>
+              <a:buChar char="•"/>
+            </a:pPr>
+            <a:r>
+              <a:rPr lang="en-US" sz="1200" dirty="0">
+                <a:solidFill>
+                  <a:srgbClr val="1C2833"/>
+                </a:solidFill>
+                <a:latin typeface="Arial" pitchFamily="34" charset="0"/>
+                <a:ea typeface="Arial" pitchFamily="34" charset="-122"/>
+                <a:cs typeface="Arial" pitchFamily="34" charset="-120"/>
+              </a:rPr>
+              <a:t>Each pair presents for 3 minutes (set the timer visibly).</a:t>
+            </a:r>
+            <a:endParaRPr lang="en-US" sz="1200" dirty="0"/>
+          </a:p>
+          <a:p>
+            <a:pPr algn="l" marL="342900" indent="-342900">
+              <a:lnSpc>
+                <a:spcPts val="1620"/>
+              </a:lnSpc>
+              <a:spcAft>
+                <a:spcPts val="300"/>
+              </a:spcAft>
+              <a:buSzPct val="100000"/>
+              <a:buChar char="•"/>
+            </a:pPr>
+            <a:r>
+              <a:rPr lang="en-US" sz="1200" dirty="0">
+                <a:solidFill>
+                  <a:srgbClr val="1C2833"/>
+                </a:solidFill>
+                <a:latin typeface="Arial" pitchFamily="34" charset="0"/>
+                <a:ea typeface="Arial" pitchFamily="34" charset="-122"/>
+                <a:cs typeface="Arial" pitchFamily="34" charset="-120"/>
+              </a:rPr>
+              <a:t>Format depends on artefact:</a:t>
+            </a:r>
+            <a:endParaRPr lang="en-US" sz="1200" dirty="0"/>
+          </a:p>
+          <a:p>
+            <a:pPr algn="l" marL="342900" indent="-342900">
+              <a:lnSpc>
+                <a:spcPts val="1620"/>
+              </a:lnSpc>
+              <a:spcAft>
+                <a:spcPts val="300"/>
+              </a:spcAft>
+              <a:buSzPct val="100000"/>
+              <a:buChar char="•"/>
+            </a:pPr>
+            <a:r>
+              <a:rPr lang="en-US" sz="1200" b="1" dirty="0">
+                <a:solidFill>
+                  <a:srgbClr val="1C2833"/>
+                </a:solidFill>
+                <a:latin typeface="Arial" pitchFamily="34" charset="0"/>
+                <a:ea typeface="Arial" pitchFamily="34" charset="-122"/>
+                <a:cs typeface="Arial" pitchFamily="34" charset="-120"/>
+              </a:rPr>
+              <a:t>Shopkeeper chart:</a:t>
+            </a:r>
             <a:pPr algn="l" indent="0" marL="0">
               <a:lnSpc>
-                <a:spcPts val="1680"/>
-              </a:lnSpc>
-              <a:spcBef>
-                <a:spcPts val="300"/>
-              </a:spcBef>
+                <a:spcPts val="1620"/>
+              </a:lnSpc>
               <a:spcAft>
                 <a:spcPts val="300"/>
               </a:spcAft>
@@ -4415,38 +4683,80 @@
                 <a:ea typeface="Arial" pitchFamily="34" charset="-122"/>
                 <a:cs typeface="Arial" pitchFamily="34" charset="-120"/>
               </a:rPr>
-              <a:t>– Quick poll: was Module 9 useful? Surprising? Hard? – Honest history note one more time: </a:t>
+              <a:t> Pair demos using pretend currency on a real scenario.</a:t>
+            </a:r>
+            <a:endParaRPr lang="en-US" sz="1200" dirty="0"/>
+          </a:p>
+          <a:p>
+            <a:pPr algn="l" marL="342900" indent="-342900">
+              <a:lnSpc>
+                <a:spcPts val="1620"/>
+              </a:lnSpc>
+              <a:spcAft>
+                <a:spcPts val="300"/>
+              </a:spcAft>
+              <a:buSzPct val="100000"/>
+              <a:buChar char="•"/>
+            </a:pPr>
+            <a:r>
+              <a:rPr lang="en-US" sz="1200" b="1" dirty="0">
+                <a:solidFill>
+                  <a:srgbClr val="1C2833"/>
+                </a:solidFill>
+                <a:latin typeface="Arial" pitchFamily="34" charset="0"/>
+                <a:ea typeface="Arial" pitchFamily="34" charset="-122"/>
+                <a:cs typeface="Arial" pitchFamily="34" charset="-120"/>
+              </a:rPr>
+              <a:t>Teaching video:</a:t>
             </a:r>
             <a:pPr algn="l" indent="0" marL="0">
               <a:lnSpc>
-                <a:spcPts val="1680"/>
-              </a:lnSpc>
-              <a:spcBef>
-                <a:spcPts val="300"/>
-              </a:spcBef>
-              <a:spcAft>
-                <a:spcPts val="300"/>
-              </a:spcAft>
-              <a:buNone/>
-            </a:pPr>
-            <a:r>
-              <a:rPr lang="en-US" sz="1200" i="1" dirty="0">
-                <a:solidFill>
-                  <a:srgbClr val="1C2833"/>
-                </a:solidFill>
-                <a:latin typeface="Arial" pitchFamily="34" charset="0"/>
-                <a:ea typeface="Arial" pitchFamily="34" charset="-122"/>
-                <a:cs typeface="Arial" pitchFamily="34" charset="-120"/>
-              </a:rPr>
-              <a:t>"You learned a real, useful method. The sūtra is from Tirthaji's 1965 book. The deeper history is more recent than the name 'Vedic' suggests. You can hold both: the method is real; the historical claim is unverified."</a:t>
+                <a:spcPts val="1620"/>
+              </a:lnSpc>
+              <a:spcAft>
+                <a:spcPts val="300"/>
+              </a:spcAft>
+              <a:buNone/>
+            </a:pPr>
+            <a:r>
+              <a:rPr lang="en-US" sz="1200" dirty="0">
+                <a:solidFill>
+                  <a:srgbClr val="1C2833"/>
+                </a:solidFill>
+                <a:latin typeface="Arial" pitchFamily="34" charset="0"/>
+                <a:ea typeface="Arial" pitchFamily="34" charset="-122"/>
+                <a:cs typeface="Arial" pitchFamily="34" charset="-120"/>
+              </a:rPr>
+              <a:t> Pair plays the 60-sec video, then takes 90 sec of Q&amp;A.</a:t>
+            </a:r>
+            <a:endParaRPr lang="en-US" sz="1200" dirty="0"/>
+          </a:p>
+          <a:p>
+            <a:pPr algn="l" marL="342900" indent="-342900">
+              <a:lnSpc>
+                <a:spcPts val="1620"/>
+              </a:lnSpc>
+              <a:spcAft>
+                <a:spcPts val="300"/>
+              </a:spcAft>
+              <a:buSzPct val="100000"/>
+              <a:buChar char="•"/>
+            </a:pPr>
+            <a:r>
+              <a:rPr lang="en-US" sz="1200" b="1" dirty="0">
+                <a:solidFill>
+                  <a:srgbClr val="1C2833"/>
+                </a:solidFill>
+                <a:latin typeface="Arial" pitchFamily="34" charset="0"/>
+                <a:ea typeface="Arial" pitchFamily="34" charset="-122"/>
+                <a:cs typeface="Arial" pitchFamily="34" charset="-120"/>
+              </a:rPr>
+              <a:t>Two's-complement poster:</a:t>
             </a:r>
             <a:pPr algn="l" indent="0" marL="0">
               <a:lnSpc>
-                <a:spcPts val="1680"/>
-              </a:lnSpc>
-              <a:spcBef>
-                <a:spcPts val="300"/>
-              </a:spcBef>
+                <a:spcPts val="1620"/>
+              </a:lnSpc>
               <a:spcAft>
                 <a:spcPts val="300"/>
               </a:spcAft>
@@ -4461,7 +4771,31 @@
                 <a:ea typeface="Arial" pitchFamily="34" charset="-122"/>
                 <a:cs typeface="Arial" pitchFamily="34" charset="-120"/>
               </a:rPr>
-              <a:t> – Self-reflection slip (1 minute): on the back of the quiz, complete: – One thing I learned: __________ – One thing I'm still confused about: __________ – My favourite Sanskrit term from the module: __________</a:t>
+              <a:t> Pair walks through the poster's argument.</a:t>
+            </a:r>
+            <a:endParaRPr lang="en-US" sz="1200" dirty="0"/>
+          </a:p>
+          <a:p>
+            <a:pPr algn="l" marL="342900" indent="-342900">
+              <a:lnSpc>
+                <a:spcPts val="1620"/>
+              </a:lnSpc>
+              <a:spcAft>
+                <a:spcPts val="300"/>
+              </a:spcAft>
+              <a:buSzPct val="100000"/>
+              <a:buChar char="•"/>
+            </a:pPr>
+            <a:r>
+              <a:rPr lang="en-US" sz="1200" dirty="0">
+                <a:solidFill>
+                  <a:srgbClr val="1C2833"/>
+                </a:solidFill>
+                <a:latin typeface="Arial" pitchFamily="34" charset="0"/>
+                <a:ea typeface="Arial" pitchFamily="34" charset="-122"/>
+                <a:cs typeface="Arial" pitchFamily="34" charset="-120"/>
+              </a:rPr>
+              <a:t>Rest of class fills in a quick "feedback card" — one strength, one question.</a:t>
             </a:r>
             <a:endParaRPr lang="en-US" sz="1200" dirty="0"/>
           </a:p>
@@ -4619,7 +4953,7 @@
                 <a:ea typeface="Georgia" pitchFamily="34" charset="-122"/>
                 <a:cs typeface="Georgia" pitchFamily="34" charset="-120"/>
               </a:rPr>
-              <a:t>Student-facing content</a:t>
+              <a:t>Wrap-up (4 min)</a:t>
             </a:r>
             <a:endParaRPr lang="en-US" sz="1800" dirty="0"/>
           </a:p>
@@ -4633,61 +4967,8 @@
         </p:nvSpPr>
         <p:spPr>
           <a:xfrm>
-            <a:off x="406301" y="883593"/>
-            <a:ext cx="8331398" cy="1631156"/>
-          </a:xfrm>
-          <a:prstGeom prst="rect">
-            <a:avLst/>
-          </a:prstGeom>
-          <a:solidFill>
-            <a:srgbClr val="F4F8F9"/>
-          </a:solidFill>
-          <a:ln/>
-        </p:spPr>
-        <p:txBody>
-          <a:bodyPr wrap="square" rtlCol="0" anchor="ctr"/>
-          <a:lstStyle/>
-          <a:p>
-            <a:pPr indent="0" marL="0">
-              <a:buNone/>
-            </a:pPr>
-            <a:endParaRPr lang="en-US" dirty="0"/>
-          </a:p>
-        </p:txBody>
-      </p:sp>
-      <p:sp>
-        <p:nvSpPr>
-          <p:cNvPr id="5" name="Shape 3"/>
-          <p:cNvSpPr/>
-          <p:nvPr/>
-        </p:nvSpPr>
-        <p:spPr>
-          <a:xfrm>
-            <a:off x="434876" y="883593"/>
-            <a:ext cx="0" cy="1631156"/>
-          </a:xfrm>
-          <a:prstGeom prst="line">
-            <a:avLst/>
-          </a:prstGeom>
-          <a:noFill/>
-          <a:ln w="57150">
-            <a:solidFill>
-              <a:srgbClr val="FE4447"/>
-            </a:solidFill>
-            <a:prstDash val="solid"/>
-          </a:ln>
-        </p:spPr>
-      </p:sp>
-      <p:sp>
-        <p:nvSpPr>
-          <p:cNvPr id="6" name="Text 4"/>
-          <p:cNvSpPr/>
-          <p:nvPr/>
-        </p:nvSpPr>
-        <p:spPr>
-          <a:xfrm>
-            <a:off x="692051" y="1074093"/>
-            <a:ext cx="7973389" cy="230981"/>
+            <a:off x="634901" y="883593"/>
+            <a:ext cx="8102798" cy="1912144"/>
           </a:xfrm>
           <a:prstGeom prst="rect">
             <a:avLst/>
@@ -4699,178 +4980,174 @@
           <a:bodyPr wrap="square" lIns="0" tIns="0" rIns="0" bIns="0" rtlCol="0" anchor="t"/>
           <a:lstStyle/>
           <a:p>
+            <a:pPr algn="l" marL="342900" indent="-342900">
+              <a:lnSpc>
+                <a:spcPts val="1620"/>
+              </a:lnSpc>
+              <a:spcAft>
+                <a:spcPts val="300"/>
+              </a:spcAft>
+              <a:buSzPct val="100000"/>
+              <a:buChar char="•"/>
+            </a:pPr>
+            <a:r>
+              <a:rPr lang="en-US" sz="1200" dirty="0">
+                <a:solidFill>
+                  <a:srgbClr val="1C2833"/>
+                </a:solidFill>
+                <a:latin typeface="Arial" pitchFamily="34" charset="0"/>
+                <a:ea typeface="Arial" pitchFamily="34" charset="-122"/>
+                <a:cs typeface="Arial" pitchFamily="34" charset="-120"/>
+              </a:rPr>
+              <a:t>Quick poll: was Module 9 useful? Surprising? Hard?</a:t>
+            </a:r>
+            <a:endParaRPr lang="en-US" sz="1200" dirty="0"/>
+          </a:p>
+          <a:p>
+            <a:pPr algn="l" marL="342900" indent="-342900">
+              <a:lnSpc>
+                <a:spcPts val="1620"/>
+              </a:lnSpc>
+              <a:spcAft>
+                <a:spcPts val="300"/>
+              </a:spcAft>
+              <a:buSzPct val="100000"/>
+              <a:buChar char="•"/>
+            </a:pPr>
+            <a:r>
+              <a:rPr lang="en-US" sz="1200" dirty="0">
+                <a:solidFill>
+                  <a:srgbClr val="1C2833"/>
+                </a:solidFill>
+                <a:latin typeface="Arial" pitchFamily="34" charset="0"/>
+                <a:ea typeface="Arial" pitchFamily="34" charset="-122"/>
+                <a:cs typeface="Arial" pitchFamily="34" charset="-120"/>
+              </a:rPr>
+              <a:t>Honest history note one more time: </a:t>
+            </a:r>
             <a:pPr algn="l" indent="0" marL="0">
               <a:lnSpc>
-                <a:spcPts val="1820"/>
-              </a:lnSpc>
-              <a:spcBef>
-                <a:spcPts val="300"/>
-              </a:spcBef>
-              <a:spcAft>
-                <a:spcPts val="300"/>
-              </a:spcAft>
-              <a:buNone/>
-            </a:pPr>
-            <a:r>
-              <a:rPr lang="en-US" sz="1300" b="1" i="1" dirty="0">
-                <a:solidFill>
-                  <a:srgbClr val="1C2833"/>
-                </a:solidFill>
-                <a:latin typeface="Georgia" pitchFamily="34" charset="0"/>
-                <a:ea typeface="Georgia" pitchFamily="34" charset="-122"/>
-                <a:cs typeface="Georgia" pitchFamily="34" charset="-120"/>
-              </a:rPr>
-              <a:t>Today's tasks</a:t>
-            </a:r>
-            <a:endParaRPr lang="en-US" sz="1300" dirty="0"/>
-          </a:p>
-        </p:txBody>
-      </p:sp>
-      <p:sp>
-        <p:nvSpPr>
-          <p:cNvPr id="7" name="Text 5"/>
-          <p:cNvSpPr/>
-          <p:nvPr/>
-        </p:nvSpPr>
-        <p:spPr>
-          <a:xfrm>
-            <a:off x="692051" y="1343174"/>
-            <a:ext cx="7973389" cy="461963"/>
-          </a:xfrm>
-          <a:prstGeom prst="rect">
-            <a:avLst/>
-          </a:prstGeom>
-          <a:noFill/>
-          <a:ln/>
-        </p:spPr>
-        <p:txBody>
-          <a:bodyPr wrap="square" lIns="0" tIns="0" rIns="0" bIns="0" rtlCol="0" anchor="t"/>
-          <a:lstStyle/>
-          <a:p>
-            <a:pPr algn="l" indent="0" marL="0">
-              <a:lnSpc>
-                <a:spcPts val="1820"/>
-              </a:lnSpc>
-              <a:spcBef>
-                <a:spcPts val="300"/>
-              </a:spcBef>
-              <a:spcAft>
-                <a:spcPts val="300"/>
-              </a:spcAft>
-              <a:buNone/>
-            </a:pPr>
-            <a:r>
-              <a:rPr lang="en-US" sz="1300" i="1" dirty="0">
-                <a:solidFill>
-                  <a:srgbClr val="1C2833"/>
-                </a:solidFill>
-                <a:latin typeface="Georgia" pitchFamily="34" charset="0"/>
-                <a:ea typeface="Georgia" pitchFamily="34" charset="-122"/>
-                <a:cs typeface="Georgia" pitchFamily="34" charset="-120"/>
-              </a:rPr>
-              <a:t>1. Summative quiz (20 min, closed notebook). 2. Project presentation (3 min, with your partner). 3. Self-reflection (1 min, on the back of the quiz).</a:t>
-            </a:r>
-            <a:endParaRPr lang="en-US" sz="1300" dirty="0"/>
-          </a:p>
-        </p:txBody>
-      </p:sp>
-      <p:sp>
-        <p:nvSpPr>
-          <p:cNvPr id="8" name="Text 6"/>
-          <p:cNvSpPr/>
-          <p:nvPr/>
-        </p:nvSpPr>
-        <p:spPr>
-          <a:xfrm>
-            <a:off x="692051" y="1843236"/>
-            <a:ext cx="7973389" cy="481012"/>
-          </a:xfrm>
-          <a:prstGeom prst="rect">
-            <a:avLst/>
-          </a:prstGeom>
-          <a:noFill/>
-          <a:ln/>
-        </p:spPr>
-        <p:txBody>
-          <a:bodyPr wrap="square" lIns="0" tIns="0" rIns="0" bIns="0" rtlCol="0" anchor="t"/>
-          <a:lstStyle/>
-          <a:p>
-            <a:pPr algn="l" indent="0" marL="0">
-              <a:lnSpc>
-                <a:spcPts val="1820"/>
-              </a:lnSpc>
-              <a:spcBef>
-                <a:spcPts val="300"/>
-              </a:spcBef>
-              <a:spcAft>
-                <a:spcPts val="300"/>
-              </a:spcAft>
-              <a:buNone/>
-            </a:pPr>
-            <a:r>
-              <a:rPr lang="en-US" sz="1300" dirty="0">
-                <a:solidFill>
-                  <a:srgbClr val="1C2833"/>
-                </a:solidFill>
-                <a:latin typeface="Georgia" pitchFamily="34" charset="0"/>
-                <a:ea typeface="Georgia" pitchFamily="34" charset="-122"/>
-                <a:cs typeface="Georgia" pitchFamily="34" charset="-120"/>
-              </a:rPr>
-              <a:t>You've come a long way. Day 1's </a:t>
-            </a:r>
-            <a:pPr algn="l" indent="0" marL="0">
-              <a:lnSpc>
-                <a:spcPts val="1820"/>
-              </a:lnSpc>
-              <a:spcBef>
-                <a:spcPts val="300"/>
-              </a:spcBef>
-              <a:spcAft>
-                <a:spcPts val="300"/>
-              </a:spcAft>
-              <a:buNone/>
-            </a:pPr>
-            <a:r>
-              <a:rPr lang="en-US" sz="1300" i="1" dirty="0">
-                <a:solidFill>
-                  <a:srgbClr val="1C2833"/>
-                </a:solidFill>
-                <a:latin typeface="Georgia" pitchFamily="34" charset="0"/>
-                <a:ea typeface="Georgia" pitchFamily="34" charset="-122"/>
-                <a:cs typeface="Georgia" pitchFamily="34" charset="-120"/>
-              </a:rPr>
-              <a:t>10 000 − 4567</a:t>
-            </a:r>
-            <a:pPr algn="l" indent="0" marL="0">
-              <a:lnSpc>
-                <a:spcPts val="1820"/>
-              </a:lnSpc>
-              <a:spcBef>
-                <a:spcPts val="300"/>
-              </a:spcBef>
-              <a:spcAft>
-                <a:spcPts val="300"/>
-              </a:spcAft>
-              <a:buNone/>
-            </a:pPr>
-            <a:r>
-              <a:rPr lang="en-US" sz="1300" dirty="0">
-                <a:solidFill>
-                  <a:srgbClr val="1C2833"/>
-                </a:solidFill>
-                <a:latin typeface="Georgia" pitchFamily="34" charset="0"/>
-                <a:ea typeface="Georgia" pitchFamily="34" charset="-122"/>
-                <a:cs typeface="Georgia" pitchFamily="34" charset="-120"/>
-              </a:rPr>
-              <a:t> took most of you about 30 seconds. By now you can do it in 5.</a:t>
-            </a:r>
-            <a:endParaRPr lang="en-US" sz="1300" dirty="0"/>
-          </a:p>
-        </p:txBody>
-      </p:sp>
-      <p:sp>
-        <p:nvSpPr>
-          <p:cNvPr id="9" name="Text 7"/>
+                <a:spcPts val="1620"/>
+              </a:lnSpc>
+              <a:spcAft>
+                <a:spcPts val="300"/>
+              </a:spcAft>
+              <a:buNone/>
+            </a:pPr>
+            <a:r>
+              <a:rPr lang="en-US" sz="1200" i="1" dirty="0">
+                <a:solidFill>
+                  <a:srgbClr val="1C2833"/>
+                </a:solidFill>
+                <a:latin typeface="Arial" pitchFamily="34" charset="0"/>
+                <a:ea typeface="Arial" pitchFamily="34" charset="-122"/>
+                <a:cs typeface="Arial" pitchFamily="34" charset="-120"/>
+              </a:rPr>
+              <a:t>"You learned a real, useful method. The sūtra is from Tirthaji's 1965 book. The deeper history is more recent than the name 'Vedic' suggests. You can hold both: the method is real; the historical claim is unverified."</a:t>
+            </a:r>
+            <a:endParaRPr lang="en-US" sz="1200" dirty="0"/>
+          </a:p>
+          <a:p>
+            <a:pPr algn="l" marL="342900" indent="-342900">
+              <a:lnSpc>
+                <a:spcPts val="1620"/>
+              </a:lnSpc>
+              <a:spcAft>
+                <a:spcPts val="300"/>
+              </a:spcAft>
+              <a:buSzPct val="100000"/>
+              <a:buChar char="•"/>
+            </a:pPr>
+            <a:r>
+              <a:rPr lang="en-US" sz="1200" dirty="0">
+                <a:solidFill>
+                  <a:srgbClr val="1C2833"/>
+                </a:solidFill>
+                <a:latin typeface="Arial" pitchFamily="34" charset="0"/>
+                <a:ea typeface="Arial" pitchFamily="34" charset="-122"/>
+                <a:cs typeface="Arial" pitchFamily="34" charset="-120"/>
+              </a:rPr>
+              <a:t>Self-reflection slip (1 minute): on the back of the quiz, complete:</a:t>
+            </a:r>
+            <a:endParaRPr lang="en-US" sz="1200" dirty="0"/>
+          </a:p>
+          <a:p>
+            <a:pPr algn="l" marL="342900" indent="-342900">
+              <a:lnSpc>
+                <a:spcPts val="1620"/>
+              </a:lnSpc>
+              <a:spcAft>
+                <a:spcPts val="300"/>
+              </a:spcAft>
+              <a:buSzPct val="100000"/>
+              <a:buChar char="•"/>
+            </a:pPr>
+            <a:r>
+              <a:rPr lang="en-US" sz="1200" dirty="0">
+                <a:solidFill>
+                  <a:srgbClr val="1C2833"/>
+                </a:solidFill>
+                <a:latin typeface="Arial" pitchFamily="34" charset="0"/>
+                <a:ea typeface="Arial" pitchFamily="34" charset="-122"/>
+                <a:cs typeface="Arial" pitchFamily="34" charset="-120"/>
+              </a:rPr>
+              <a:t>One thing I learned: __________</a:t>
+            </a:r>
+            <a:endParaRPr lang="en-US" sz="1200" dirty="0"/>
+          </a:p>
+          <a:p>
+            <a:pPr algn="l" marL="342900" indent="-342900">
+              <a:lnSpc>
+                <a:spcPts val="1620"/>
+              </a:lnSpc>
+              <a:spcAft>
+                <a:spcPts val="300"/>
+              </a:spcAft>
+              <a:buSzPct val="100000"/>
+              <a:buChar char="•"/>
+            </a:pPr>
+            <a:r>
+              <a:rPr lang="en-US" sz="1200" dirty="0">
+                <a:solidFill>
+                  <a:srgbClr val="1C2833"/>
+                </a:solidFill>
+                <a:latin typeface="Arial" pitchFamily="34" charset="0"/>
+                <a:ea typeface="Arial" pitchFamily="34" charset="-122"/>
+                <a:cs typeface="Arial" pitchFamily="34" charset="-120"/>
+              </a:rPr>
+              <a:t>One thing I'm still confused about: __________</a:t>
+            </a:r>
+            <a:endParaRPr lang="en-US" sz="1200" dirty="0"/>
+          </a:p>
+          <a:p>
+            <a:pPr algn="l" marL="342900" indent="-342900">
+              <a:lnSpc>
+                <a:spcPts val="1620"/>
+              </a:lnSpc>
+              <a:spcAft>
+                <a:spcPts val="300"/>
+              </a:spcAft>
+              <a:buSzPct val="100000"/>
+              <a:buChar char="•"/>
+            </a:pPr>
+            <a:r>
+              <a:rPr lang="en-US" sz="1200" dirty="0">
+                <a:solidFill>
+                  <a:srgbClr val="1C2833"/>
+                </a:solidFill>
+                <a:latin typeface="Arial" pitchFamily="34" charset="0"/>
+                <a:ea typeface="Arial" pitchFamily="34" charset="-122"/>
+                <a:cs typeface="Arial" pitchFamily="34" charset="-120"/>
+              </a:rPr>
+              <a:t>My favourite Sanskrit term from the module: __________</a:t>
+            </a:r>
+            <a:endParaRPr lang="en-US" sz="1200" dirty="0"/>
+          </a:p>
+        </p:txBody>
+      </p:sp>
+      <p:sp>
+        <p:nvSpPr>
+          <p:cNvPr id="5" name="Text 3"/>
           <p:cNvSpPr/>
           <p:nvPr/>
         </p:nvSpPr>
@@ -5020,7 +5297,7 @@
                 <a:ea typeface="Georgia" pitchFamily="34" charset="-122"/>
                 <a:cs typeface="Georgia" pitchFamily="34" charset="-120"/>
               </a:rPr>
-              <a:t>Homework</a:t>
+              <a:t>Student-facing content</a:t>
             </a:r>
             <a:endParaRPr lang="en-US" sz="1800" dirty="0"/>
           </a:p>
@@ -5034,8 +5311,61 @@
         </p:nvSpPr>
         <p:spPr>
           <a:xfrm>
-            <a:off x="406301" y="870942"/>
-            <a:ext cx="8498026" cy="213271"/>
+            <a:off x="406301" y="883593"/>
+            <a:ext cx="8331398" cy="1938337"/>
+          </a:xfrm>
+          <a:prstGeom prst="rect">
+            <a:avLst/>
+          </a:prstGeom>
+          <a:solidFill>
+            <a:srgbClr val="F4F8F9"/>
+          </a:solidFill>
+          <a:ln/>
+        </p:spPr>
+        <p:txBody>
+          <a:bodyPr wrap="square" rtlCol="0" anchor="ctr"/>
+          <a:lstStyle/>
+          <a:p>
+            <a:pPr indent="0" marL="0">
+              <a:buNone/>
+            </a:pPr>
+            <a:endParaRPr lang="en-US" dirty="0"/>
+          </a:p>
+        </p:txBody>
+      </p:sp>
+      <p:sp>
+        <p:nvSpPr>
+          <p:cNvPr id="5" name="Shape 3"/>
+          <p:cNvSpPr/>
+          <p:nvPr/>
+        </p:nvSpPr>
+        <p:spPr>
+          <a:xfrm>
+            <a:off x="434876" y="883593"/>
+            <a:ext cx="0" cy="1938337"/>
+          </a:xfrm>
+          <a:prstGeom prst="line">
+            <a:avLst/>
+          </a:prstGeom>
+          <a:noFill/>
+          <a:ln w="57150">
+            <a:solidFill>
+              <a:srgbClr val="FE4447"/>
+            </a:solidFill>
+            <a:prstDash val="solid"/>
+          </a:ln>
+        </p:spPr>
+      </p:sp>
+      <p:sp>
+        <p:nvSpPr>
+          <p:cNvPr id="6" name="Text 4"/>
+          <p:cNvSpPr/>
+          <p:nvPr/>
+        </p:nvSpPr>
+        <p:spPr>
+          <a:xfrm>
+            <a:off x="692051" y="1074093"/>
+            <a:ext cx="7973389" cy="230981"/>
           </a:xfrm>
           <a:prstGeom prst="rect">
             <a:avLst/>
@@ -5049,7 +5379,7 @@
           <a:p>
             <a:pPr algn="l" indent="0" marL="0">
               <a:lnSpc>
-                <a:spcPts val="1680"/>
+                <a:spcPts val="1820"/>
               </a:lnSpc>
               <a:spcBef>
                 <a:spcPts val="300"/>
@@ -5060,23 +5390,261 @@
               <a:buNone/>
             </a:pPr>
             <a:r>
-              <a:rPr lang="en-US" sz="1200" dirty="0">
-                <a:solidFill>
-                  <a:srgbClr val="1C2833"/>
-                </a:solidFill>
-                <a:latin typeface="Arial" pitchFamily="34" charset="0"/>
-                <a:ea typeface="Arial" pitchFamily="34" charset="-122"/>
-                <a:cs typeface="Arial" pitchFamily="34" charset="-120"/>
-              </a:rPr>
-              <a:t>– None. Module ends.</a:t>
-            </a:r>
-            <a:endParaRPr lang="en-US" sz="1200" dirty="0"/>
-          </a:p>
-        </p:txBody>
-      </p:sp>
-      <p:sp>
-        <p:nvSpPr>
-          <p:cNvPr id="5" name="Text 3"/>
+              <a:rPr lang="en-US" sz="1300" b="1" i="1" dirty="0">
+                <a:solidFill>
+                  <a:srgbClr val="1C2833"/>
+                </a:solidFill>
+                <a:latin typeface="Georgia" pitchFamily="34" charset="0"/>
+                <a:ea typeface="Georgia" pitchFamily="34" charset="-122"/>
+                <a:cs typeface="Georgia" pitchFamily="34" charset="-120"/>
+              </a:rPr>
+              <a:t>Today's tasks</a:t>
+            </a:r>
+            <a:endParaRPr lang="en-US" sz="1300" dirty="0"/>
+          </a:p>
+        </p:txBody>
+      </p:sp>
+      <p:sp>
+        <p:nvSpPr>
+          <p:cNvPr id="7" name="Text 5"/>
+          <p:cNvSpPr/>
+          <p:nvPr/>
+        </p:nvSpPr>
+        <p:spPr>
+          <a:xfrm>
+            <a:off x="692051" y="1343174"/>
+            <a:ext cx="7973389" cy="230981"/>
+          </a:xfrm>
+          <a:prstGeom prst="rect">
+            <a:avLst/>
+          </a:prstGeom>
+          <a:noFill/>
+          <a:ln/>
+        </p:spPr>
+        <p:txBody>
+          <a:bodyPr wrap="square" lIns="0" tIns="0" rIns="0" bIns="0" rtlCol="0" anchor="t"/>
+          <a:lstStyle/>
+          <a:p>
+            <a:pPr algn="l" indent="0" marL="0">
+              <a:lnSpc>
+                <a:spcPts val="1820"/>
+              </a:lnSpc>
+              <a:spcBef>
+                <a:spcPts val="300"/>
+              </a:spcBef>
+              <a:spcAft>
+                <a:spcPts val="300"/>
+              </a:spcAft>
+              <a:buNone/>
+            </a:pPr>
+            <a:r>
+              <a:rPr lang="en-US" sz="1300" i="1" dirty="0">
+                <a:solidFill>
+                  <a:srgbClr val="1C2833"/>
+                </a:solidFill>
+                <a:latin typeface="Georgia" pitchFamily="34" charset="0"/>
+                <a:ea typeface="Georgia" pitchFamily="34" charset="-122"/>
+                <a:cs typeface="Georgia" pitchFamily="34" charset="-120"/>
+              </a:rPr>
+              <a:t>Summative quiz (20 min, closed notebook).</a:t>
+            </a:r>
+            <a:endParaRPr lang="en-US" sz="1300" dirty="0"/>
+          </a:p>
+        </p:txBody>
+      </p:sp>
+      <p:sp>
+        <p:nvSpPr>
+          <p:cNvPr id="8" name="Text 6"/>
+          <p:cNvSpPr/>
+          <p:nvPr/>
+        </p:nvSpPr>
+        <p:spPr>
+          <a:xfrm>
+            <a:off x="692051" y="1612255"/>
+            <a:ext cx="7973389" cy="230981"/>
+          </a:xfrm>
+          <a:prstGeom prst="rect">
+            <a:avLst/>
+          </a:prstGeom>
+          <a:noFill/>
+          <a:ln/>
+        </p:spPr>
+        <p:txBody>
+          <a:bodyPr wrap="square" lIns="0" tIns="0" rIns="0" bIns="0" rtlCol="0" anchor="t"/>
+          <a:lstStyle/>
+          <a:p>
+            <a:pPr algn="l" indent="0" marL="0">
+              <a:lnSpc>
+                <a:spcPts val="1820"/>
+              </a:lnSpc>
+              <a:spcBef>
+                <a:spcPts val="300"/>
+              </a:spcBef>
+              <a:spcAft>
+                <a:spcPts val="300"/>
+              </a:spcAft>
+              <a:buNone/>
+            </a:pPr>
+            <a:r>
+              <a:rPr lang="en-US" sz="1300" i="1" dirty="0">
+                <a:solidFill>
+                  <a:srgbClr val="1C2833"/>
+                </a:solidFill>
+                <a:latin typeface="Georgia" pitchFamily="34" charset="0"/>
+                <a:ea typeface="Georgia" pitchFamily="34" charset="-122"/>
+                <a:cs typeface="Georgia" pitchFamily="34" charset="-120"/>
+              </a:rPr>
+              <a:t>Project presentation (3 min, with your partner).</a:t>
+            </a:r>
+            <a:endParaRPr lang="en-US" sz="1300" dirty="0"/>
+          </a:p>
+        </p:txBody>
+      </p:sp>
+      <p:sp>
+        <p:nvSpPr>
+          <p:cNvPr id="9" name="Text 7"/>
+          <p:cNvSpPr/>
+          <p:nvPr/>
+        </p:nvSpPr>
+        <p:spPr>
+          <a:xfrm>
+            <a:off x="692051" y="1881336"/>
+            <a:ext cx="7973389" cy="230981"/>
+          </a:xfrm>
+          <a:prstGeom prst="rect">
+            <a:avLst/>
+          </a:prstGeom>
+          <a:noFill/>
+          <a:ln/>
+        </p:spPr>
+        <p:txBody>
+          <a:bodyPr wrap="square" lIns="0" tIns="0" rIns="0" bIns="0" rtlCol="0" anchor="t"/>
+          <a:lstStyle/>
+          <a:p>
+            <a:pPr algn="l" indent="0" marL="0">
+              <a:lnSpc>
+                <a:spcPts val="1820"/>
+              </a:lnSpc>
+              <a:spcBef>
+                <a:spcPts val="300"/>
+              </a:spcBef>
+              <a:spcAft>
+                <a:spcPts val="300"/>
+              </a:spcAft>
+              <a:buNone/>
+            </a:pPr>
+            <a:r>
+              <a:rPr lang="en-US" sz="1300" i="1" dirty="0">
+                <a:solidFill>
+                  <a:srgbClr val="1C2833"/>
+                </a:solidFill>
+                <a:latin typeface="Georgia" pitchFamily="34" charset="0"/>
+                <a:ea typeface="Georgia" pitchFamily="34" charset="-122"/>
+                <a:cs typeface="Georgia" pitchFamily="34" charset="-120"/>
+              </a:rPr>
+              <a:t>Self-reflection (1 min, on the back of the quiz).</a:t>
+            </a:r>
+            <a:endParaRPr lang="en-US" sz="1300" dirty="0"/>
+          </a:p>
+        </p:txBody>
+      </p:sp>
+      <p:sp>
+        <p:nvSpPr>
+          <p:cNvPr id="10" name="Text 8"/>
+          <p:cNvSpPr/>
+          <p:nvPr/>
+        </p:nvSpPr>
+        <p:spPr>
+          <a:xfrm>
+            <a:off x="692051" y="2150418"/>
+            <a:ext cx="7973389" cy="481012"/>
+          </a:xfrm>
+          <a:prstGeom prst="rect">
+            <a:avLst/>
+          </a:prstGeom>
+          <a:noFill/>
+          <a:ln/>
+        </p:spPr>
+        <p:txBody>
+          <a:bodyPr wrap="square" lIns="0" tIns="0" rIns="0" bIns="0" rtlCol="0" anchor="t"/>
+          <a:lstStyle/>
+          <a:p>
+            <a:pPr algn="l" indent="0" marL="0">
+              <a:lnSpc>
+                <a:spcPts val="1820"/>
+              </a:lnSpc>
+              <a:spcBef>
+                <a:spcPts val="300"/>
+              </a:spcBef>
+              <a:spcAft>
+                <a:spcPts val="300"/>
+              </a:spcAft>
+              <a:buNone/>
+            </a:pPr>
+            <a:r>
+              <a:rPr lang="en-US" sz="1300" dirty="0">
+                <a:solidFill>
+                  <a:srgbClr val="1C2833"/>
+                </a:solidFill>
+                <a:latin typeface="Georgia" pitchFamily="34" charset="0"/>
+                <a:ea typeface="Georgia" pitchFamily="34" charset="-122"/>
+                <a:cs typeface="Georgia" pitchFamily="34" charset="-120"/>
+              </a:rPr>
+              <a:t>You've come a long way. Day 1's </a:t>
+            </a:r>
+            <a:pPr algn="l" indent="0" marL="0">
+              <a:lnSpc>
+                <a:spcPts val="1820"/>
+              </a:lnSpc>
+              <a:spcBef>
+                <a:spcPts val="300"/>
+              </a:spcBef>
+              <a:spcAft>
+                <a:spcPts val="300"/>
+              </a:spcAft>
+              <a:buNone/>
+            </a:pPr>
+            <a:r>
+              <a:rPr lang="en-US" sz="1300" i="1" dirty="0">
+                <a:solidFill>
+                  <a:srgbClr val="1C2833"/>
+                </a:solidFill>
+                <a:latin typeface="Georgia" pitchFamily="34" charset="0"/>
+                <a:ea typeface="Georgia" pitchFamily="34" charset="-122"/>
+                <a:cs typeface="Georgia" pitchFamily="34" charset="-120"/>
+              </a:rPr>
+              <a:t>10 000 − 4567</a:t>
+            </a:r>
+            <a:pPr algn="l" indent="0" marL="0">
+              <a:lnSpc>
+                <a:spcPts val="1820"/>
+              </a:lnSpc>
+              <a:spcBef>
+                <a:spcPts val="300"/>
+              </a:spcBef>
+              <a:spcAft>
+                <a:spcPts val="300"/>
+              </a:spcAft>
+              <a:buNone/>
+            </a:pPr>
+            <a:r>
+              <a:rPr lang="en-US" sz="1300" dirty="0">
+                <a:solidFill>
+                  <a:srgbClr val="1C2833"/>
+                </a:solidFill>
+                <a:latin typeface="Georgia" pitchFamily="34" charset="0"/>
+                <a:ea typeface="Georgia" pitchFamily="34" charset="-122"/>
+                <a:cs typeface="Georgia" pitchFamily="34" charset="-120"/>
+              </a:rPr>
+              <a:t> took most of you about 30 seconds. By now you can do it in 5.</a:t>
+            </a:r>
+            <a:endParaRPr lang="en-US" sz="1300" dirty="0"/>
+          </a:p>
+        </p:txBody>
+      </p:sp>
+      <p:sp>
+        <p:nvSpPr>
+          <p:cNvPr id="11" name="Text 9"/>
           <p:cNvSpPr/>
           <p:nvPr/>
         </p:nvSpPr>
